--- a/Renewable-Energy-Intelligence-Platform.pptx
+++ b/Renewable-Energy-Intelligence-Platform.pptx
@@ -4,6 +4,9 @@
   <p:sldMasterIdLst>
     <p:sldMasterId id="2147483648" r:id="rId1"/>
   </p:sldMasterIdLst>
+  <p:notesMasterIdLst>
+    <p:notesMasterId r:id="rId10"/>
+  </p:notesMasterIdLst>
   <p:sldIdLst>
     <p:sldId id="256" r:id="rId2"/>
     <p:sldId id="257" r:id="rId3"/>
@@ -14,9 +17,6 @@
     <p:sldId id="262" r:id="rId8"/>
     <p:sldId id="263" r:id="rId9"/>
   </p:sldIdLst>
-  <p:notesMasterIdLst>
-    <p:notesMasterId r:id="rId10"/>
-  </p:notesMasterIdLst>
   <p:sldSz cx="12192000" cy="6858000"/>
   <p:notesSz cx="6858000" cy="12192000"/>
   <p:defaultTextStyle>
@@ -111,6 +111,11 @@
       </a:defRPr>
     </a:lvl9pPr>
   </p:defaultTextStyle>
+  <p:extLst>
+    <p:ext uri="{EFAFB233-063F-42B5-8137-9DF3F51BA10A}">
+      <p15:sldGuideLst xmlns:p15="http://schemas.microsoft.com/office/powerpoint/2012/main"/>
+    </p:ext>
+  </p:extLst>
 </p:presentation>
 </file>
 
@@ -136,234 +141,10 @@
           <a:chExt cx="0" cy="0"/>
         </a:xfrm>
       </p:grpSpPr>
-      <p:sp>
-        <p:nvSpPr>
-          <p:cNvPr id="2" name="Header Placeholder 1"/>
-          <p:cNvSpPr>
-            <a:spLocks noGrp="1"/>
-          </p:cNvSpPr>
-          <p:nvPr>
-            <p:ph type="hdr" sz="quarter"/>
-          </p:nvPr>
-        </p:nvSpPr>
-        <p:spPr>
-          <a:xfrm>
-            <a:off x="0" y="0"/>
-            <a:ext cx="2971800" cy="458788"/>
-          </a:xfrm>
-          <a:prstGeom prst="rect">
-            <a:avLst/>
-          </a:prstGeom>
-        </p:spPr>
-        <p:txBody>
-          <a:bodyPr vert="horz" lIns="91440" tIns="45720" rIns="91440" bIns="45720" rtlCol="0"/>
-          <a:lstStyle>
-            <a:lvl1pPr algn="l">
-              <a:defRPr sz="1200"/>
-            </a:lvl1pPr>
-          </a:lstStyle>
-          <a:p>
-            <a:endParaRPr lang="en-US"/>
-          </a:p>
-        </p:txBody>
-      </p:sp>
-      <p:sp>
-        <p:nvSpPr>
-          <p:cNvPr id="3" name="Date Placeholder 2"/>
-          <p:cNvSpPr>
-            <a:spLocks noGrp="1"/>
-          </p:cNvSpPr>
-          <p:nvPr>
-            <p:ph type="dt" idx="1"/>
-          </p:nvPr>
-        </p:nvSpPr>
-        <p:spPr>
-          <a:xfrm>
-            <a:off x="3884613" y="0"/>
-            <a:ext cx="2971800" cy="458788"/>
-          </a:xfrm>
-          <a:prstGeom prst="rect">
-            <a:avLst/>
-          </a:prstGeom>
-        </p:spPr>
-        <p:txBody>
-          <a:bodyPr vert="horz" lIns="91440" tIns="45720" rIns="91440" bIns="45720" rtlCol="0"/>
-          <a:lstStyle>
-            <a:lvl1pPr algn="r">
-              <a:defRPr sz="1200"/>
-            </a:lvl1pPr>
-          </a:lstStyle>
-          <a:p>
-            <a:fld id="{5282F153-3F37-0F45-9E97-73ACFA13230C}" type="datetimeFigureOut">
-              <a:rPr lang="en-US"/>
-              <a:t>7/23/19</a:t>
-            </a:fld>
-            <a:endParaRPr lang="en-US"/>
-          </a:p>
-        </p:txBody>
-      </p:sp>
-      <p:sp>
-        <p:nvSpPr>
-          <p:cNvPr id="4" name="Slide Image Placeholder 3"/>
-          <p:cNvSpPr>
-            <a:spLocks noGrp="1" noRot="1" noChangeAspect="1"/>
-          </p:cNvSpPr>
-          <p:nvPr>
-            <p:ph type="sldImg" idx="2"/>
-          </p:nvPr>
-        </p:nvSpPr>
-        <p:spPr>
-          <a:xfrm>
-            <a:off x="685800" y="1143000"/>
-            <a:ext cx="5486400" cy="3086100"/>
-          </a:xfrm>
-          <a:prstGeom prst="rect">
-            <a:avLst/>
-          </a:prstGeom>
-          <a:noFill/>
-          <a:ln w="12700">
-            <a:solidFill>
-              <a:prstClr val="black"/>
-            </a:solidFill>
-          </a:ln>
-        </p:spPr>
-        <p:txBody>
-          <a:bodyPr vert="horz" lIns="91440" tIns="45720" rIns="91440" bIns="45720" rtlCol="0" anchor="ctr"/>
-          <a:lstStyle/>
-          <a:p>
-            <a:endParaRPr lang="en-US"/>
-          </a:p>
-        </p:txBody>
-      </p:sp>
-      <p:sp>
-        <p:nvSpPr>
-          <p:cNvPr id="5" name="Notes Placeholder 4"/>
-          <p:cNvSpPr>
-            <a:spLocks noGrp="1"/>
-          </p:cNvSpPr>
-          <p:nvPr>
-            <p:ph type="body" sz="quarter" idx="3"/>
-          </p:nvPr>
-        </p:nvSpPr>
-        <p:spPr>
-          <a:xfrm>
-            <a:off x="685800" y="4400550"/>
-            <a:ext cx="5486400" cy="3600450"/>
-          </a:xfrm>
-          <a:prstGeom prst="rect">
-            <a:avLst/>
-          </a:prstGeom>
-        </p:spPr>
-        <p:txBody>
-          <a:bodyPr vert="horz" lIns="91440" tIns="45720" rIns="91440" bIns="45720" rtlCol="0"/>
-          <a:lstStyle/>
-          <a:p>
-            <a:pPr lvl="0"/>
-            <a:r>
-              <a:rPr lang="en-US"/>
-              <a:t>Click to edit Master text styles</a:t>
-            </a:r>
-          </a:p>
-          <a:p>
-            <a:pPr lvl="1"/>
-            <a:r>
-              <a:rPr lang="en-US"/>
-              <a:t>Second level</a:t>
-            </a:r>
-          </a:p>
-          <a:p>
-            <a:pPr lvl="2"/>
-            <a:r>
-              <a:rPr lang="en-US"/>
-              <a:t>Third level</a:t>
-            </a:r>
-          </a:p>
-          <a:p>
-            <a:pPr lvl="3"/>
-            <a:r>
-              <a:rPr lang="en-US"/>
-              <a:t>Fourth level</a:t>
-            </a:r>
-          </a:p>
-          <a:p>
-            <a:pPr lvl="4"/>
-            <a:r>
-              <a:rPr lang="en-US"/>
-              <a:t>Fifth level</a:t>
-            </a:r>
-          </a:p>
-        </p:txBody>
-      </p:sp>
-      <p:sp>
-        <p:nvSpPr>
-          <p:cNvPr id="6" name="Footer Placeholder 5"/>
-          <p:cNvSpPr>
-            <a:spLocks noGrp="1"/>
-          </p:cNvSpPr>
-          <p:nvPr>
-            <p:ph type="ftr" sz="quarter" idx="4"/>
-          </p:nvPr>
-        </p:nvSpPr>
-        <p:spPr>
-          <a:xfrm>
-            <a:off x="0" y="8685213"/>
-            <a:ext cx="2971800" cy="458787"/>
-          </a:xfrm>
-          <a:prstGeom prst="rect">
-            <a:avLst/>
-          </a:prstGeom>
-        </p:spPr>
-        <p:txBody>
-          <a:bodyPr vert="horz" lIns="91440" tIns="45720" rIns="91440" bIns="45720" rtlCol="0" anchor="b"/>
-          <a:lstStyle>
-            <a:lvl1pPr algn="l">
-              <a:defRPr sz="1200"/>
-            </a:lvl1pPr>
-          </a:lstStyle>
-          <a:p>
-            <a:endParaRPr lang="en-US"/>
-          </a:p>
-        </p:txBody>
-      </p:sp>
-      <p:sp>
-        <p:nvSpPr>
-          <p:cNvPr id="7" name="Slide Number Placeholder 6"/>
-          <p:cNvSpPr>
-            <a:spLocks noGrp="1"/>
-          </p:cNvSpPr>
-          <p:nvPr>
-            <p:ph type="sldNum" sz="quarter" idx="5"/>
-          </p:nvPr>
-        </p:nvSpPr>
-        <p:spPr>
-          <a:xfrm>
-            <a:off x="3884613" y="8685213"/>
-            <a:ext cx="2971800" cy="458787"/>
-          </a:xfrm>
-          <a:prstGeom prst="rect">
-            <a:avLst/>
-          </a:prstGeom>
-        </p:spPr>
-        <p:txBody>
-          <a:bodyPr vert="horz" lIns="91440" tIns="45720" rIns="91440" bIns="45720" rtlCol="0" anchor="b"/>
-          <a:lstStyle>
-            <a:lvl1pPr algn="r">
-              <a:defRPr sz="1200"/>
-            </a:lvl1pPr>
-          </a:lstStyle>
-          <a:p>
-            <a:fld id="{CE5E9CC1-C706-0F49-92D6-E571CC5EEA8F}" type="slidenum">
-              <a:rPr lang="en-US"/>
-              <a:t>‹#›</a:t>
-            </a:fld>
-            <a:endParaRPr lang="en-US"/>
-          </a:p>
-        </p:txBody>
-      </p:sp>
     </p:spTree>
     <p:extLst>
       <p:ext uri="{BB962C8B-B14F-4D97-AF65-F5344CB8AC3E}">
-        <p14:creationId xmlns:p14="http://schemas.microsoft.com/office/powerpoint/2010/main" val="1024086991"/>
+        <p14:creationId xmlns:p14="http://schemas.microsoft.com/office/powerpoint/2010/main" val="3472579703"/>
       </p:ext>
     </p:extLst>
   </p:cSld>
@@ -511,7 +292,6 @@
               <a:rPr lang="en-US" dirty="0"/>
               <a:t>Integrated P2P energy trading + REC fraud detection. Shared source of truth prevents double-selling energy and over-claiming RECs.</a:t>
             </a:r>
-            <a:endParaRPr lang="en-US" dirty="0"/>
           </a:p>
         </p:txBody>
       </p:sp>
@@ -599,7 +379,6 @@
               <a:rPr lang="en-US" dirty="0"/>
               <a:t>One export event backs both the tradable surplus and REC issuance — structurally prevents double counting.</a:t>
             </a:r>
-            <a:endParaRPr lang="en-US" dirty="0"/>
           </a:p>
         </p:txBody>
       </p:sp>
@@ -687,7 +466,6 @@
               <a:rPr lang="en-US" dirty="0"/>
               <a:t>Layered architecture with swappable strategy interfaces; trust and keys stay server-side.</a:t>
             </a:r>
-            <a:endParaRPr lang="en-US" dirty="0"/>
           </a:p>
         </p:txBody>
       </p:sp>
@@ -775,7 +553,6 @@
               <a:rPr lang="en-US" dirty="0"/>
               <a:t>Six-step pipeline; guardrails: audit log, RBAC, live anomaly detection.</a:t>
             </a:r>
-            <a:endParaRPr lang="en-US" dirty="0"/>
           </a:p>
         </p:txBody>
       </p:sp>
@@ -863,7 +640,6 @@
               <a:rPr lang="en-US" dirty="0"/>
               <a:t>Rule engine R-01..R-08 + R-09 statistical anomaly (robust modified z-score); optional Groq and Gemini passes with deterministic fallbacks.</a:t>
             </a:r>
-            <a:endParaRPr lang="en-US" dirty="0"/>
           </a:p>
         </p:txBody>
       </p:sp>
@@ -951,7 +727,6 @@
               <a:rPr lang="en-US" dirty="0"/>
               <a:t>Six roles with RBAC-scoped APIs and dashboards: prosumer, consumer, utility, regulator, certificate body, auditor.</a:t>
             </a:r>
-            <a:endParaRPr lang="en-US" dirty="0"/>
           </a:p>
         </p:txBody>
       </p:sp>
@@ -1039,7 +814,6 @@
               <a:rPr lang="en-US" dirty="0"/>
               <a:t>Appendix C demo: stream -&gt; offer -&gt; settle -&gt; issue REC -&gt; detect fault -&gt; revoke &amp; verify on chain.</a:t>
             </a:r>
-            <a:endParaRPr lang="en-US" dirty="0"/>
           </a:p>
         </p:txBody>
       </p:sp>
@@ -1127,7 +901,6 @@
               <a:rPr lang="en-US" dirty="0"/>
               <a:t>Closing: value pillars — integrity, proof, fairness, oversight.</a:t>
             </a:r>
-            <a:endParaRPr lang="en-US" dirty="0"/>
           </a:p>
         </p:txBody>
       </p:sp>
@@ -1200,6 +973,11 @@
 <file path=ppt/slideMasters/slideMaster1.xml><?xml version="1.0" encoding="utf-8"?>
 <p:sldMaster xmlns:a="http://schemas.openxmlformats.org/drawingml/2006/main" xmlns:r="http://schemas.openxmlformats.org/officeDocument/2006/relationships" xmlns:p="http://schemas.openxmlformats.org/presentationml/2006/main">
   <p:cSld>
+    <p:bg>
+      <p:bgRef idx="1001">
+        <a:schemeClr val="bg1"/>
+      </p:bgRef>
+    </p:bg>
     <p:spTree>
       <p:nvGrpSpPr>
         <p:cNvPr id="1" name=""/>
@@ -1482,6 +1260,7 @@
         <a:solidFill>
           <a:srgbClr val="0B211B"/>
         </a:solidFill>
+        <a:effectLst/>
       </p:bgPr>
     </p:bg>
     <p:spTree>
@@ -1619,11 +1398,11 @@
           <a:bodyPr wrap="square" rtlCol="0" anchor="ctr"/>
           <a:lstStyle/>
           <a:p>
-            <a:pPr indent="0" marL="0">
-              <a:buNone/>
-            </a:pPr>
-            <a:r>
-              <a:rPr lang="en-US" sz="1400" b="1" spc="400" kern="0" dirty="0">
+            <a:pPr marL="0" indent="0">
+              <a:buNone/>
+            </a:pPr>
+            <a:r>
+              <a:rPr lang="en-US" sz="1400" b="1" kern="0" spc="400" dirty="0">
                 <a:solidFill>
                   <a:srgbClr val="F4C54A"/>
                 </a:solidFill>
@@ -1658,7 +1437,7 @@
           <a:bodyPr wrap="square" rtlCol="0" anchor="ctr"/>
           <a:lstStyle/>
           <a:p>
-            <a:pPr indent="0" marL="0">
+            <a:pPr marL="0" indent="0">
               <a:lnSpc>
                 <a:spcPts val="5800"/>
               </a:lnSpc>
@@ -1678,7 +1457,7 @@
             <a:endParaRPr lang="en-US" sz="5400" dirty="0"/>
           </a:p>
           <a:p>
-            <a:pPr indent="0" marL="0">
+            <a:pPr marL="0" indent="0">
               <a:lnSpc>
                 <a:spcPts val="5800"/>
               </a:lnSpc>
@@ -1720,7 +1499,7 @@
           <a:bodyPr wrap="square" rtlCol="0" anchor="ctr"/>
           <a:lstStyle/>
           <a:p>
-            <a:pPr indent="0" marL="0">
+            <a:pPr marL="0" indent="0">
               <a:lnSpc>
                 <a:spcPts val="2400"/>
               </a:lnSpc>
@@ -1743,41 +1522,14 @@
       </p:sp>
       <p:sp>
         <p:nvSpPr>
-          <p:cNvPr id="10" name="Shape 8"/>
-          <p:cNvSpPr/>
-          <p:nvPr/>
-        </p:nvSpPr>
-        <p:spPr>
-          <a:xfrm>
-            <a:off x="822960" y="5257800"/>
-            <a:ext cx="1965960" cy="384048"/>
-          </a:xfrm>
-          <a:prstGeom prst="roundRect">
-            <a:avLst>
-              <a:gd name="adj" fmla="val 50000"/>
-            </a:avLst>
-          </a:prstGeom>
-          <a:solidFill>
-            <a:srgbClr val="10362C"/>
-          </a:solidFill>
-          <a:ln w="12700">
-            <a:solidFill>
-              <a:srgbClr val="18B47E"/>
-            </a:solidFill>
-            <a:prstDash val="solid"/>
-          </a:ln>
-        </p:spPr>
-      </p:sp>
-      <p:sp>
-        <p:nvSpPr>
           <p:cNvPr id="11" name="Text 9"/>
           <p:cNvSpPr txBox="1"/>
           <p:nvPr/>
         </p:nvSpPr>
         <p:spPr>
           <a:xfrm>
-            <a:off x="822960" y="5257800"/>
-            <a:ext cx="1965960" cy="384048"/>
+            <a:off x="2705877" y="5271796"/>
+            <a:ext cx="3909526" cy="384048"/>
           </a:xfrm>
           <a:prstGeom prst="rect">
             <a:avLst/>
@@ -1789,11 +1541,11 @@
           <a:bodyPr wrap="square" lIns="0" tIns="0" rIns="0" bIns="0" rtlCol="0" anchor="ctr"/>
           <a:lstStyle/>
           <a:p>
-            <a:pPr algn="ctr" indent="0" marL="0">
-              <a:buNone/>
-            </a:pPr>
-            <a:r>
-              <a:rPr lang="en-US" sz="1150" b="1" dirty="0">
+            <a:pPr marL="0" indent="0" algn="ctr">
+              <a:buNone/>
+            </a:pPr>
+            <a:r>
+              <a:rPr lang="en-US" sz="2000" b="1" dirty="0">
                 <a:solidFill>
                   <a:srgbClr val="CFEBE0"/>
                 </a:solidFill>
@@ -1801,65 +1553,10 @@
                 <a:ea typeface="Calibri" pitchFamily="34" charset="-122"/>
                 <a:cs typeface="Calibri" pitchFamily="34" charset="-120"/>
               </a:rPr>
-              <a:t>Next.js 15 · TS</a:t>
-            </a:r>
-            <a:endParaRPr lang="en-US" sz="1150" dirty="0"/>
-          </a:p>
-        </p:txBody>
-      </p:sp>
-      <p:sp>
-        <p:nvSpPr>
-          <p:cNvPr id="12" name="Shape 10"/>
-          <p:cNvSpPr/>
-          <p:nvPr/>
-        </p:nvSpPr>
-        <p:spPr>
-          <a:xfrm>
-            <a:off x="2926080" y="5257800"/>
-            <a:ext cx="2057400" cy="384048"/>
-          </a:xfrm>
-          <a:prstGeom prst="roundRect">
-            <a:avLst>
-              <a:gd name="adj" fmla="val 50000"/>
-            </a:avLst>
-          </a:prstGeom>
-          <a:solidFill>
-            <a:srgbClr val="10362C"/>
-          </a:solidFill>
-          <a:ln w="12700">
-            <a:solidFill>
-              <a:srgbClr val="18B47E"/>
-            </a:solidFill>
-            <a:prstDash val="solid"/>
-          </a:ln>
-        </p:spPr>
-      </p:sp>
-      <p:sp>
-        <p:nvSpPr>
-          <p:cNvPr id="13" name="Text 11"/>
-          <p:cNvSpPr txBox="1"/>
-          <p:nvPr/>
-        </p:nvSpPr>
-        <p:spPr>
-          <a:xfrm>
-            <a:off x="2926080" y="5257800"/>
-            <a:ext cx="2057400" cy="384048"/>
-          </a:xfrm>
-          <a:prstGeom prst="rect">
-            <a:avLst/>
-          </a:prstGeom>
-          <a:noFill/>
-          <a:ln/>
-        </p:spPr>
-        <p:txBody>
-          <a:bodyPr wrap="square" lIns="0" tIns="0" rIns="0" bIns="0" rtlCol="0" anchor="ctr"/>
-          <a:lstStyle/>
-          <a:p>
-            <a:pPr algn="ctr" indent="0" marL="0">
-              <a:buNone/>
-            </a:pPr>
-            <a:r>
-              <a:rPr lang="en-US" sz="1150" b="1" dirty="0">
+              <a:t>Team  - </a:t>
+            </a:r>
+            <a:r>
+              <a:rPr lang="en-US" sz="2000" b="1" dirty="0" err="1">
                 <a:solidFill>
                   <a:srgbClr val="CFEBE0"/>
                 </a:solidFill>
@@ -1867,141 +1564,9 @@
                 <a:ea typeface="Calibri" pitchFamily="34" charset="-122"/>
                 <a:cs typeface="Calibri" pitchFamily="34" charset="-120"/>
               </a:rPr>
-              <a:t>MongoDB Atlas</a:t>
-            </a:r>
-            <a:endParaRPr lang="en-US" sz="1150" dirty="0"/>
-          </a:p>
-        </p:txBody>
-      </p:sp>
-      <p:sp>
-        <p:nvSpPr>
-          <p:cNvPr id="14" name="Shape 12"/>
-          <p:cNvSpPr/>
-          <p:nvPr/>
-        </p:nvSpPr>
-        <p:spPr>
-          <a:xfrm>
-            <a:off x="5120640" y="5257800"/>
-            <a:ext cx="2331720" cy="384048"/>
-          </a:xfrm>
-          <a:prstGeom prst="roundRect">
-            <a:avLst>
-              <a:gd name="adj" fmla="val 50000"/>
-            </a:avLst>
-          </a:prstGeom>
-          <a:solidFill>
-            <a:srgbClr val="10362C"/>
-          </a:solidFill>
-          <a:ln w="12700">
-            <a:solidFill>
-              <a:srgbClr val="18B47E"/>
-            </a:solidFill>
-            <a:prstDash val="solid"/>
-          </a:ln>
-        </p:spPr>
-      </p:sp>
-      <p:sp>
-        <p:nvSpPr>
-          <p:cNvPr id="15" name="Text 13"/>
-          <p:cNvSpPr txBox="1"/>
-          <p:nvPr/>
-        </p:nvSpPr>
-        <p:spPr>
-          <a:xfrm>
-            <a:off x="5120640" y="5257800"/>
-            <a:ext cx="2331720" cy="384048"/>
-          </a:xfrm>
-          <a:prstGeom prst="rect">
-            <a:avLst/>
-          </a:prstGeom>
-          <a:noFill/>
-          <a:ln/>
-        </p:spPr>
-        <p:txBody>
-          <a:bodyPr wrap="square" lIns="0" tIns="0" rIns="0" bIns="0" rtlCol="0" anchor="ctr"/>
-          <a:lstStyle/>
-          <a:p>
-            <a:pPr algn="ctr" indent="0" marL="0">
-              <a:buNone/>
-            </a:pPr>
-            <a:r>
-              <a:rPr lang="en-US" sz="1150" b="1" dirty="0">
-                <a:solidFill>
-                  <a:srgbClr val="CFEBE0"/>
-                </a:solidFill>
-                <a:latin typeface="Calibri" pitchFamily="34" charset="0"/>
-                <a:ea typeface="Calibri" pitchFamily="34" charset="-122"/>
-                <a:cs typeface="Calibri" pitchFamily="34" charset="-120"/>
-              </a:rPr>
-              <a:t>Polygon Amoy anchor</a:t>
-            </a:r>
-            <a:endParaRPr lang="en-US" sz="1150" dirty="0"/>
-          </a:p>
-        </p:txBody>
-      </p:sp>
-      <p:sp>
-        <p:nvSpPr>
-          <p:cNvPr id="16" name="Shape 14"/>
-          <p:cNvSpPr/>
-          <p:nvPr/>
-        </p:nvSpPr>
-        <p:spPr>
-          <a:xfrm>
-            <a:off x="7589520" y="5257800"/>
-            <a:ext cx="2103120" cy="384048"/>
-          </a:xfrm>
-          <a:prstGeom prst="roundRect">
-            <a:avLst>
-              <a:gd name="adj" fmla="val 50000"/>
-            </a:avLst>
-          </a:prstGeom>
-          <a:solidFill>
-            <a:srgbClr val="10362C"/>
-          </a:solidFill>
-          <a:ln w="12700">
-            <a:solidFill>
-              <a:srgbClr val="F4C54A"/>
-            </a:solidFill>
-            <a:prstDash val="solid"/>
-          </a:ln>
-        </p:spPr>
-      </p:sp>
-      <p:sp>
-        <p:nvSpPr>
-          <p:cNvPr id="17" name="Text 15"/>
-          <p:cNvSpPr txBox="1"/>
-          <p:nvPr/>
-        </p:nvSpPr>
-        <p:spPr>
-          <a:xfrm>
-            <a:off x="7589520" y="5257800"/>
-            <a:ext cx="2103120" cy="384048"/>
-          </a:xfrm>
-          <a:prstGeom prst="rect">
-            <a:avLst/>
-          </a:prstGeom>
-          <a:noFill/>
-          <a:ln/>
-        </p:spPr>
-        <p:txBody>
-          <a:bodyPr wrap="square" lIns="0" tIns="0" rIns="0" bIns="0" rtlCol="0" anchor="ctr"/>
-          <a:lstStyle/>
-          <a:p>
-            <a:pPr algn="ctr" indent="0" marL="0">
-              <a:buNone/>
-            </a:pPr>
-            <a:r>
-              <a:rPr lang="en-US" sz="1150" b="1" dirty="0">
-                <a:solidFill>
-                  <a:srgbClr val="F4C54A"/>
-                </a:solidFill>
-                <a:latin typeface="Calibri" pitchFamily="34" charset="0"/>
-                <a:ea typeface="Calibri" pitchFamily="34" charset="-122"/>
-                <a:cs typeface="Calibri" pitchFamily="34" charset="-120"/>
-              </a:rPr>
-              <a:t>Groq · Gemini AI</a:t>
-            </a:r>
-            <a:endParaRPr lang="en-US" sz="1150" dirty="0"/>
+              <a:t>ABnity</a:t>
+            </a:r>
+            <a:endParaRPr lang="en-US" sz="2000" dirty="0"/>
           </a:p>
         </p:txBody>
       </p:sp>
@@ -2021,6 +1586,7 @@
         <a:solidFill>
           <a:srgbClr val="F5F8F6"/>
         </a:solidFill>
+        <a:effectLst/>
       </p:bgPr>
     </p:bg>
     <p:spTree>
@@ -2058,7 +1624,7 @@
           <a:bodyPr wrap="square" rtlCol="0" anchor="ctr"/>
           <a:lstStyle/>
           <a:p>
-            <a:pPr indent="0" marL="0">
+            <a:pPr marL="0" indent="0">
               <a:buNone/>
             </a:pPr>
             <a:r>
@@ -2097,7 +1663,7 @@
           <a:bodyPr wrap="square" rtlCol="0" anchor="ctr"/>
           <a:lstStyle/>
           <a:p>
-            <a:pPr indent="0" marL="0">
+            <a:pPr marL="0" indent="0">
               <a:buNone/>
             </a:pPr>
             <a:r>
@@ -2123,8 +1689,8 @@
         </p:nvSpPr>
         <p:spPr>
           <a:xfrm>
-            <a:off x="731520" y="2148840"/>
-            <a:ext cx="3246120" cy="2514600"/>
+            <a:off x="731520" y="2148839"/>
+            <a:ext cx="3246120" cy="2670045"/>
           </a:xfrm>
           <a:prstGeom prst="roundRect">
             <a:avLst>
@@ -2136,7 +1702,7 @@
           </a:solidFill>
           <a:ln/>
           <a:effectLst>
-            <a:outerShdw sx="100000" sy="100000" kx="0" ky="0" algn="bl" rotWithShape="0" blurRad="114300" dist="38100" dir="5400000">
+            <a:outerShdw blurRad="114300" dist="38100" dir="5400000" algn="bl" rotWithShape="0">
               <a:srgbClr val="8CA79C">
                 <a:alpha val="45000"/>
               </a:srgbClr>
@@ -2185,7 +1751,7 @@
           <a:bodyPr wrap="square" lIns="0" tIns="0" rIns="0" bIns="0" rtlCol="0" anchor="ctr"/>
           <a:lstStyle/>
           <a:p>
-            <a:pPr algn="ctr" indent="0" marL="0">
+            <a:pPr marL="0" indent="0" algn="ctr">
               <a:buNone/>
             </a:pPr>
             <a:r>
@@ -2224,7 +1790,7 @@
           <a:bodyPr wrap="square" rtlCol="0" anchor="ctr"/>
           <a:lstStyle/>
           <a:p>
-            <a:pPr indent="0" marL="0">
+            <a:pPr marL="0" indent="0">
               <a:buNone/>
             </a:pPr>
             <a:r>
@@ -2263,7 +1829,7 @@
           <a:bodyPr wrap="square" rtlCol="0" anchor="ctr"/>
           <a:lstStyle/>
           <a:p>
-            <a:pPr indent="0" marL="0">
+            <a:pPr marL="0" indent="0">
               <a:lnSpc>
                 <a:spcPts val="1600"/>
               </a:lnSpc>
@@ -2293,7 +1859,7 @@
         <p:spPr>
           <a:xfrm>
             <a:off x="4023360" y="2880360"/>
-            <a:ext cx="1051560" cy="-320040"/>
+            <a:ext cx="1051560" cy="0"/>
           </a:xfrm>
           <a:prstGeom prst="line">
             <a:avLst/>
@@ -2358,7 +1924,7 @@
             <a:prstDash val="solid"/>
           </a:ln>
           <a:effectLst>
-            <a:outerShdw sx="100000" sy="100000" kx="0" ky="0" algn="bl" rotWithShape="0" blurRad="88900" dist="25400" dir="5400000">
+            <a:outerShdw blurRad="88900" dist="25400" dir="5400000" algn="bl" rotWithShape="0">
               <a:srgbClr val="9CB3AA">
                 <a:alpha val="35000"/>
               </a:srgbClr>
@@ -2407,11 +1973,11 @@
           <a:bodyPr wrap="square" rtlCol="0" anchor="ctr"/>
           <a:lstStyle/>
           <a:p>
-            <a:pPr indent="0" marL="0">
-              <a:buNone/>
-            </a:pPr>
-            <a:r>
-              <a:rPr lang="en-US" sz="1050" b="1" spc="200" kern="0" dirty="0">
+            <a:pPr marL="0" indent="0">
+              <a:buNone/>
+            </a:pPr>
+            <a:r>
+              <a:rPr lang="en-US" sz="1050" b="1" kern="0" spc="200" dirty="0">
                 <a:solidFill>
                   <a:srgbClr val="18B47E"/>
                 </a:solidFill>
@@ -2446,7 +2012,7 @@
           <a:bodyPr wrap="square" rtlCol="0" anchor="ctr"/>
           <a:lstStyle/>
           <a:p>
-            <a:pPr indent="0" marL="0">
+            <a:pPr marL="0" indent="0">
               <a:buNone/>
             </a:pPr>
             <a:r>
@@ -2485,7 +2051,7 @@
           <a:bodyPr wrap="square" rtlCol="0" anchor="ctr"/>
           <a:lstStyle/>
           <a:p>
-            <a:pPr indent="0" marL="0">
+            <a:pPr marL="0" indent="0">
               <a:lnSpc>
                 <a:spcPts val="1600"/>
               </a:lnSpc>
@@ -2532,7 +2098,7 @@
             <a:prstDash val="solid"/>
           </a:ln>
           <a:effectLst>
-            <a:outerShdw sx="100000" sy="100000" kx="0" ky="0" algn="bl" rotWithShape="0" blurRad="88900" dist="25400" dir="5400000">
+            <a:outerShdw blurRad="88900" dist="25400" dir="5400000" algn="bl" rotWithShape="0">
               <a:srgbClr val="9CB3AA">
                 <a:alpha val="35000"/>
               </a:srgbClr>
@@ -2581,11 +2147,11 @@
           <a:bodyPr wrap="square" rtlCol="0" anchor="ctr"/>
           <a:lstStyle/>
           <a:p>
-            <a:pPr indent="0" marL="0">
-              <a:buNone/>
-            </a:pPr>
-            <a:r>
-              <a:rPr lang="en-US" sz="1050" b="1" spc="200" kern="0" dirty="0">
+            <a:pPr marL="0" indent="0">
+              <a:buNone/>
+            </a:pPr>
+            <a:r>
+              <a:rPr lang="en-US" sz="1050" b="1" kern="0" spc="200" dirty="0">
                 <a:solidFill>
                   <a:srgbClr val="0E7F5A"/>
                 </a:solidFill>
@@ -2620,7 +2186,7 @@
           <a:bodyPr wrap="square" rtlCol="0" anchor="ctr"/>
           <a:lstStyle/>
           <a:p>
-            <a:pPr indent="0" marL="0">
+            <a:pPr marL="0" indent="0">
               <a:buNone/>
             </a:pPr>
             <a:r>
@@ -2659,7 +2225,7 @@
           <a:bodyPr wrap="square" rtlCol="0" anchor="ctr"/>
           <a:lstStyle/>
           <a:p>
-            <a:pPr indent="0" marL="0">
+            <a:pPr marL="0" indent="0">
               <a:lnSpc>
                 <a:spcPts val="1600"/>
               </a:lnSpc>
@@ -2688,7 +2254,7 @@
         </p:nvSpPr>
         <p:spPr>
           <a:xfrm>
-            <a:off x="731520" y="5074920"/>
+            <a:off x="731520" y="5364173"/>
             <a:ext cx="10698480" cy="960120"/>
           </a:xfrm>
           <a:prstGeom prst="roundRect">
@@ -2710,7 +2276,7 @@
         </p:nvSpPr>
         <p:spPr>
           <a:xfrm>
-            <a:off x="1051560" y="5074920"/>
+            <a:off x="1089817" y="5303519"/>
             <a:ext cx="10058400" cy="960120"/>
           </a:xfrm>
           <a:prstGeom prst="rect">
@@ -2723,7 +2289,7 @@
           <a:bodyPr wrap="square" rtlCol="0" anchor="ctr"/>
           <a:lstStyle/>
           <a:p>
-            <a:pPr indent="0" marL="0">
+            <a:pPr marL="0" indent="0">
               <a:buNone/>
             </a:pPr>
             <a:r>
@@ -2737,9 +2303,6 @@
               </a:rPr>
               <a:t>The result:  </a:t>
             </a:r>
-            <a:pPr indent="0" marL="0">
-              <a:buNone/>
-            </a:pPr>
             <a:r>
               <a:rPr lang="en-US" sz="1550" dirty="0">
                 <a:solidFill>
@@ -2771,6 +2334,7 @@
         <a:solidFill>
           <a:srgbClr val="F5F8F6"/>
         </a:solidFill>
+        <a:effectLst/>
       </p:bgPr>
     </p:bg>
     <p:spTree>
@@ -2808,7 +2372,7 @@
           <a:bodyPr wrap="square" rtlCol="0" anchor="ctr"/>
           <a:lstStyle/>
           <a:p>
-            <a:pPr indent="0" marL="0">
+            <a:pPr marL="0" indent="0">
               <a:buNone/>
             </a:pPr>
             <a:r>
@@ -2847,7 +2411,7 @@
           <a:bodyPr wrap="square" rtlCol="0" anchor="ctr"/>
           <a:lstStyle/>
           <a:p>
-            <a:pPr indent="0" marL="0">
+            <a:pPr marL="0" indent="0">
               <a:buNone/>
             </a:pPr>
             <a:r>
@@ -2935,7 +2499,7 @@
           <a:bodyPr wrap="square" lIns="0" tIns="0" rIns="0" bIns="0" rtlCol="0" anchor="ctr"/>
           <a:lstStyle/>
           <a:p>
-            <a:pPr algn="ctr" indent="0" marL="0">
+            <a:pPr marL="0" indent="0" algn="ctr">
               <a:buNone/>
             </a:pPr>
             <a:r>
@@ -2974,7 +2538,7 @@
           <a:bodyPr wrap="square" rtlCol="0" anchor="ctr"/>
           <a:lstStyle/>
           <a:p>
-            <a:pPr indent="0" marL="0">
+            <a:pPr marL="0" indent="0">
               <a:buNone/>
             </a:pPr>
             <a:r>
@@ -3013,7 +2577,7 @@
           <a:bodyPr wrap="square" rtlCol="0" anchor="ctr"/>
           <a:lstStyle/>
           <a:p>
-            <a:pPr indent="0" marL="0">
+            <a:pPr marL="0" indent="0">
               <a:buNone/>
             </a:pPr>
             <a:r>
@@ -3101,7 +2665,7 @@
           <a:bodyPr wrap="square" lIns="0" tIns="0" rIns="0" bIns="0" rtlCol="0" anchor="ctr"/>
           <a:lstStyle/>
           <a:p>
-            <a:pPr algn="ctr" indent="0" marL="0">
+            <a:pPr marL="0" indent="0" algn="ctr">
               <a:buNone/>
             </a:pPr>
             <a:r>
@@ -3140,7 +2704,7 @@
           <a:bodyPr wrap="square" rtlCol="0" anchor="ctr"/>
           <a:lstStyle/>
           <a:p>
-            <a:pPr indent="0" marL="0">
+            <a:pPr marL="0" indent="0">
               <a:buNone/>
             </a:pPr>
             <a:r>
@@ -3179,7 +2743,7 @@
           <a:bodyPr wrap="square" rtlCol="0" anchor="ctr"/>
           <a:lstStyle/>
           <a:p>
-            <a:pPr indent="0" marL="0">
+            <a:pPr marL="0" indent="0">
               <a:buNone/>
             </a:pPr>
             <a:r>
@@ -3267,7 +2831,7 @@
           <a:bodyPr wrap="square" lIns="0" tIns="0" rIns="0" bIns="0" rtlCol="0" anchor="ctr"/>
           <a:lstStyle/>
           <a:p>
-            <a:pPr algn="ctr" indent="0" marL="0">
+            <a:pPr marL="0" indent="0" algn="ctr">
               <a:buNone/>
             </a:pPr>
             <a:r>
@@ -3306,7 +2870,7 @@
           <a:bodyPr wrap="square" rtlCol="0" anchor="ctr"/>
           <a:lstStyle/>
           <a:p>
-            <a:pPr indent="0" marL="0">
+            <a:pPr marL="0" indent="0">
               <a:buNone/>
             </a:pPr>
             <a:r>
@@ -3345,7 +2909,7 @@
           <a:bodyPr wrap="square" rtlCol="0" anchor="ctr"/>
           <a:lstStyle/>
           <a:p>
-            <a:pPr indent="0" marL="0">
+            <a:pPr marL="0" indent="0">
               <a:buNone/>
             </a:pPr>
             <a:r>
@@ -3433,7 +2997,7 @@
           <a:bodyPr wrap="square" lIns="0" tIns="0" rIns="0" bIns="0" rtlCol="0" anchor="ctr"/>
           <a:lstStyle/>
           <a:p>
-            <a:pPr algn="ctr" indent="0" marL="0">
+            <a:pPr marL="0" indent="0" algn="ctr">
               <a:buNone/>
             </a:pPr>
             <a:r>
@@ -3472,7 +3036,7 @@
           <a:bodyPr wrap="square" rtlCol="0" anchor="ctr"/>
           <a:lstStyle/>
           <a:p>
-            <a:pPr indent="0" marL="0">
+            <a:pPr marL="0" indent="0">
               <a:buNone/>
             </a:pPr>
             <a:r>
@@ -3511,7 +3075,7 @@
           <a:bodyPr wrap="square" rtlCol="0" anchor="ctr"/>
           <a:lstStyle/>
           <a:p>
-            <a:pPr indent="0" marL="0">
+            <a:pPr marL="0" indent="0">
               <a:buNone/>
             </a:pPr>
             <a:r>
@@ -3599,7 +3163,7 @@
           <a:bodyPr wrap="square" lIns="0" tIns="0" rIns="0" bIns="0" rtlCol="0" anchor="ctr"/>
           <a:lstStyle/>
           <a:p>
-            <a:pPr algn="ctr" indent="0" marL="0">
+            <a:pPr marL="0" indent="0" algn="ctr">
               <a:buNone/>
             </a:pPr>
             <a:r>
@@ -3638,7 +3202,7 @@
           <a:bodyPr wrap="square" rtlCol="0" anchor="ctr"/>
           <a:lstStyle/>
           <a:p>
-            <a:pPr indent="0" marL="0">
+            <a:pPr marL="0" indent="0">
               <a:buNone/>
             </a:pPr>
             <a:r>
@@ -3677,7 +3241,7 @@
           <a:bodyPr wrap="square" rtlCol="0" anchor="ctr"/>
           <a:lstStyle/>
           <a:p>
-            <a:pPr indent="0" marL="0">
+            <a:pPr marL="0" indent="0">
               <a:buNone/>
             </a:pPr>
             <a:r>
@@ -3738,11 +3302,11 @@
           <a:bodyPr wrap="square" rtlCol="0" anchor="ctr"/>
           <a:lstStyle/>
           <a:p>
-            <a:pPr indent="0" marL="0">
-              <a:buNone/>
-            </a:pPr>
-            <a:r>
-              <a:rPr lang="en-US" sz="1100" b="1" spc="300" kern="0" dirty="0">
+            <a:pPr marL="0" indent="0">
+              <a:buNone/>
+            </a:pPr>
+            <a:r>
+              <a:rPr lang="en-US" sz="1100" b="1" kern="0" spc="300" dirty="0">
                 <a:solidFill>
                   <a:srgbClr val="F4C54A"/>
                 </a:solidFill>
@@ -3797,7 +3361,7 @@
           <a:bodyPr wrap="square" rtlCol="0" anchor="ctr"/>
           <a:lstStyle/>
           <a:p>
-            <a:pPr indent="0" marL="0">
+            <a:pPr marL="0" indent="0">
               <a:buNone/>
             </a:pPr>
             <a:r>
@@ -3836,7 +3400,7 @@
           <a:bodyPr wrap="square" rtlCol="0" anchor="ctr"/>
           <a:lstStyle/>
           <a:p>
-            <a:pPr indent="0" marL="0">
+            <a:pPr marL="0" indent="0">
               <a:lnSpc>
                 <a:spcPts val="1500"/>
               </a:lnSpc>
@@ -3898,7 +3462,7 @@
           <a:bodyPr wrap="square" rtlCol="0" anchor="ctr"/>
           <a:lstStyle/>
           <a:p>
-            <a:pPr indent="0" marL="0">
+            <a:pPr marL="0" indent="0">
               <a:buNone/>
             </a:pPr>
             <a:r>
@@ -3937,7 +3501,7 @@
           <a:bodyPr wrap="square" rtlCol="0" anchor="ctr"/>
           <a:lstStyle/>
           <a:p>
-            <a:pPr indent="0" marL="0">
+            <a:pPr marL="0" indent="0">
               <a:lnSpc>
                 <a:spcPts val="1500"/>
               </a:lnSpc>
@@ -3999,7 +3563,7 @@
           <a:bodyPr wrap="square" rtlCol="0" anchor="ctr"/>
           <a:lstStyle/>
           <a:p>
-            <a:pPr indent="0" marL="0">
+            <a:pPr marL="0" indent="0">
               <a:buNone/>
             </a:pPr>
             <a:r>
@@ -4038,7 +3602,7 @@
           <a:bodyPr wrap="square" rtlCol="0" anchor="ctr"/>
           <a:lstStyle/>
           <a:p>
-            <a:pPr indent="0" marL="0">
+            <a:pPr marL="0" indent="0">
               <a:lnSpc>
                 <a:spcPts val="1500"/>
               </a:lnSpc>
@@ -4075,6 +3639,7 @@
         <a:solidFill>
           <a:srgbClr val="0B211B"/>
         </a:solidFill>
+        <a:effectLst/>
       </p:bgPr>
     </p:bg>
     <p:spTree>
@@ -4112,7 +3677,7 @@
           <a:bodyPr wrap="square" rtlCol="0" anchor="ctr"/>
           <a:lstStyle/>
           <a:p>
-            <a:pPr indent="0" marL="0">
+            <a:pPr marL="0" indent="0">
               <a:buNone/>
             </a:pPr>
             <a:r>
@@ -4151,7 +3716,7 @@
           <a:bodyPr wrap="square" rtlCol="0" anchor="ctr"/>
           <a:lstStyle/>
           <a:p>
-            <a:pPr indent="0" marL="0">
+            <a:pPr marL="0" indent="0">
               <a:buNone/>
             </a:pPr>
             <a:r>
@@ -4237,7 +3802,7 @@
           <a:bodyPr wrap="square" lIns="0" tIns="0" rIns="0" bIns="0" rtlCol="0" anchor="ctr"/>
           <a:lstStyle/>
           <a:p>
-            <a:pPr algn="ctr" indent="0" marL="0">
+            <a:pPr marL="0" indent="0" algn="ctr">
               <a:buNone/>
             </a:pPr>
             <a:r>
@@ -4276,7 +3841,7 @@
           <a:bodyPr wrap="square" rtlCol="0" anchor="ctr"/>
           <a:lstStyle/>
           <a:p>
-            <a:pPr algn="ctr" indent="0" marL="0">
+            <a:pPr marL="0" indent="0" algn="ctr">
               <a:buNone/>
             </a:pPr>
             <a:r>
@@ -4315,7 +3880,7 @@
           <a:bodyPr wrap="square" rtlCol="0" anchor="ctr"/>
           <a:lstStyle/>
           <a:p>
-            <a:pPr algn="ctr" indent="0" marL="0">
+            <a:pPr marL="0" indent="0" algn="ctr">
               <a:lnSpc>
                 <a:spcPts val="1400"/>
               </a:lnSpc>
@@ -4428,7 +3993,7 @@
           <a:bodyPr wrap="square" lIns="0" tIns="0" rIns="0" bIns="0" rtlCol="0" anchor="ctr"/>
           <a:lstStyle/>
           <a:p>
-            <a:pPr algn="ctr" indent="0" marL="0">
+            <a:pPr marL="0" indent="0" algn="ctr">
               <a:buNone/>
             </a:pPr>
             <a:r>
@@ -4467,7 +4032,7 @@
           <a:bodyPr wrap="square" rtlCol="0" anchor="ctr"/>
           <a:lstStyle/>
           <a:p>
-            <a:pPr algn="ctr" indent="0" marL="0">
+            <a:pPr marL="0" indent="0" algn="ctr">
               <a:buNone/>
             </a:pPr>
             <a:r>
@@ -4506,7 +4071,7 @@
           <a:bodyPr wrap="square" rtlCol="0" anchor="ctr"/>
           <a:lstStyle/>
           <a:p>
-            <a:pPr algn="ctr" indent="0" marL="0">
+            <a:pPr marL="0" indent="0" algn="ctr">
               <a:lnSpc>
                 <a:spcPts val="1400"/>
               </a:lnSpc>
@@ -4619,7 +4184,7 @@
           <a:bodyPr wrap="square" lIns="0" tIns="0" rIns="0" bIns="0" rtlCol="0" anchor="ctr"/>
           <a:lstStyle/>
           <a:p>
-            <a:pPr algn="ctr" indent="0" marL="0">
+            <a:pPr marL="0" indent="0" algn="ctr">
               <a:buNone/>
             </a:pPr>
             <a:r>
@@ -4658,7 +4223,7 @@
           <a:bodyPr wrap="square" rtlCol="0" anchor="ctr"/>
           <a:lstStyle/>
           <a:p>
-            <a:pPr algn="ctr" indent="0" marL="0">
+            <a:pPr marL="0" indent="0" algn="ctr">
               <a:buNone/>
             </a:pPr>
             <a:r>
@@ -4697,7 +4262,7 @@
           <a:bodyPr wrap="square" rtlCol="0" anchor="ctr"/>
           <a:lstStyle/>
           <a:p>
-            <a:pPr algn="ctr" indent="0" marL="0">
+            <a:pPr marL="0" indent="0" algn="ctr">
               <a:lnSpc>
                 <a:spcPts val="1400"/>
               </a:lnSpc>
@@ -4810,7 +4375,7 @@
           <a:bodyPr wrap="square" lIns="0" tIns="0" rIns="0" bIns="0" rtlCol="0" anchor="ctr"/>
           <a:lstStyle/>
           <a:p>
-            <a:pPr algn="ctr" indent="0" marL="0">
+            <a:pPr marL="0" indent="0" algn="ctr">
               <a:buNone/>
             </a:pPr>
             <a:r>
@@ -4849,7 +4414,7 @@
           <a:bodyPr wrap="square" rtlCol="0" anchor="ctr"/>
           <a:lstStyle/>
           <a:p>
-            <a:pPr algn="ctr" indent="0" marL="0">
+            <a:pPr marL="0" indent="0" algn="ctr">
               <a:buNone/>
             </a:pPr>
             <a:r>
@@ -4888,7 +4453,7 @@
           <a:bodyPr wrap="square" rtlCol="0" anchor="ctr"/>
           <a:lstStyle/>
           <a:p>
-            <a:pPr algn="ctr" indent="0" marL="0">
+            <a:pPr marL="0" indent="0" algn="ctr">
               <a:lnSpc>
                 <a:spcPts val="1400"/>
               </a:lnSpc>
@@ -5001,7 +4566,7 @@
           <a:bodyPr wrap="square" lIns="0" tIns="0" rIns="0" bIns="0" rtlCol="0" anchor="ctr"/>
           <a:lstStyle/>
           <a:p>
-            <a:pPr algn="ctr" indent="0" marL="0">
+            <a:pPr marL="0" indent="0" algn="ctr">
               <a:buNone/>
             </a:pPr>
             <a:r>
@@ -5040,7 +4605,7 @@
           <a:bodyPr wrap="square" rtlCol="0" anchor="ctr"/>
           <a:lstStyle/>
           <a:p>
-            <a:pPr algn="ctr" indent="0" marL="0">
+            <a:pPr marL="0" indent="0" algn="ctr">
               <a:buNone/>
             </a:pPr>
             <a:r>
@@ -5079,7 +4644,7 @@
           <a:bodyPr wrap="square" rtlCol="0" anchor="ctr"/>
           <a:lstStyle/>
           <a:p>
-            <a:pPr algn="ctr" indent="0" marL="0">
+            <a:pPr marL="0" indent="0" algn="ctr">
               <a:lnSpc>
                 <a:spcPts val="1400"/>
               </a:lnSpc>
@@ -5192,7 +4757,7 @@
           <a:bodyPr wrap="square" lIns="0" tIns="0" rIns="0" bIns="0" rtlCol="0" anchor="ctr"/>
           <a:lstStyle/>
           <a:p>
-            <a:pPr algn="ctr" indent="0" marL="0">
+            <a:pPr marL="0" indent="0" algn="ctr">
               <a:buNone/>
             </a:pPr>
             <a:r>
@@ -5231,7 +4796,7 @@
           <a:bodyPr wrap="square" rtlCol="0" anchor="ctr"/>
           <a:lstStyle/>
           <a:p>
-            <a:pPr algn="ctr" indent="0" marL="0">
+            <a:pPr marL="0" indent="0" algn="ctr">
               <a:buNone/>
             </a:pPr>
             <a:r>
@@ -5270,7 +4835,7 @@
           <a:bodyPr wrap="square" rtlCol="0" anchor="ctr"/>
           <a:lstStyle/>
           <a:p>
-            <a:pPr algn="ctr" indent="0" marL="0">
+            <a:pPr marL="0" indent="0" algn="ctr">
               <a:lnSpc>
                 <a:spcPts val="1400"/>
               </a:lnSpc>
@@ -5354,7 +4919,7 @@
           <a:bodyPr wrap="square" lIns="0" tIns="0" rIns="0" bIns="0" rtlCol="0" anchor="ctr"/>
           <a:lstStyle/>
           <a:p>
-            <a:pPr algn="ctr" indent="0" marL="0">
+            <a:pPr marL="0" indent="0" algn="ctr">
               <a:buNone/>
             </a:pPr>
             <a:r>
@@ -5393,7 +4958,7 @@
           <a:bodyPr wrap="square" rtlCol="0" anchor="ctr"/>
           <a:lstStyle/>
           <a:p>
-            <a:pPr indent="0" marL="0">
+            <a:pPr marL="0" indent="0">
               <a:buNone/>
             </a:pPr>
             <a:r>
@@ -5432,7 +4997,7 @@
           <a:bodyPr wrap="square" rtlCol="0" anchor="ctr"/>
           <a:lstStyle/>
           <a:p>
-            <a:pPr indent="0" marL="0">
+            <a:pPr marL="0" indent="0">
               <a:buNone/>
             </a:pPr>
             <a:r>
@@ -5491,7 +5056,7 @@
           <a:bodyPr wrap="square" lIns="0" tIns="0" rIns="0" bIns="0" rtlCol="0" anchor="ctr"/>
           <a:lstStyle/>
           <a:p>
-            <a:pPr algn="ctr" indent="0" marL="0">
+            <a:pPr marL="0" indent="0" algn="ctr">
               <a:buNone/>
             </a:pPr>
             <a:r>
@@ -5530,7 +5095,7 @@
           <a:bodyPr wrap="square" rtlCol="0" anchor="ctr"/>
           <a:lstStyle/>
           <a:p>
-            <a:pPr indent="0" marL="0">
+            <a:pPr marL="0" indent="0">
               <a:buNone/>
             </a:pPr>
             <a:r>
@@ -5569,7 +5134,7 @@
           <a:bodyPr wrap="square" rtlCol="0" anchor="ctr"/>
           <a:lstStyle/>
           <a:p>
-            <a:pPr indent="0" marL="0">
+            <a:pPr marL="0" indent="0">
               <a:buNone/>
             </a:pPr>
             <a:r>
@@ -5628,7 +5193,7 @@
           <a:bodyPr wrap="square" lIns="0" tIns="0" rIns="0" bIns="0" rtlCol="0" anchor="ctr"/>
           <a:lstStyle/>
           <a:p>
-            <a:pPr algn="ctr" indent="0" marL="0">
+            <a:pPr marL="0" indent="0" algn="ctr">
               <a:buNone/>
             </a:pPr>
             <a:r>
@@ -5667,7 +5232,7 @@
           <a:bodyPr wrap="square" rtlCol="0" anchor="ctr"/>
           <a:lstStyle/>
           <a:p>
-            <a:pPr indent="0" marL="0">
+            <a:pPr marL="0" indent="0">
               <a:buNone/>
             </a:pPr>
             <a:r>
@@ -5706,7 +5271,7 @@
           <a:bodyPr wrap="square" rtlCol="0" anchor="ctr"/>
           <a:lstStyle/>
           <a:p>
-            <a:pPr indent="0" marL="0">
+            <a:pPr marL="0" indent="0">
               <a:buNone/>
             </a:pPr>
             <a:r>
@@ -5740,6 +5305,7 @@
         <a:solidFill>
           <a:srgbClr val="F5F8F6"/>
         </a:solidFill>
+        <a:effectLst/>
       </p:bgPr>
     </p:bg>
     <p:spTree>
@@ -5777,7 +5343,7 @@
           <a:bodyPr wrap="square" rtlCol="0" anchor="ctr"/>
           <a:lstStyle/>
           <a:p>
-            <a:pPr indent="0" marL="0">
+            <a:pPr marL="0" indent="0">
               <a:buNone/>
             </a:pPr>
             <a:r>
@@ -5816,7 +5382,7 @@
           <a:bodyPr wrap="square" rtlCol="0" anchor="ctr"/>
           <a:lstStyle/>
           <a:p>
-            <a:pPr indent="0" marL="0">
+            <a:pPr marL="0" indent="0">
               <a:buNone/>
             </a:pPr>
             <a:r>
@@ -5877,11 +5443,11 @@
           <a:bodyPr wrap="square" rtlCol="0" anchor="ctr"/>
           <a:lstStyle/>
           <a:p>
-            <a:pPr indent="0" marL="0">
-              <a:buNone/>
-            </a:pPr>
-            <a:r>
-              <a:rPr lang="en-US" sz="1100" b="1" spc="200" kern="0" dirty="0">
+            <a:pPr marL="0" indent="0">
+              <a:buNone/>
+            </a:pPr>
+            <a:r>
+              <a:rPr lang="en-US" sz="1100" b="1" kern="0" spc="200" dirty="0">
                 <a:solidFill>
                   <a:srgbClr val="F4C54A"/>
                 </a:solidFill>
@@ -5916,7 +5482,7 @@
           <a:bodyPr wrap="square" rtlCol="0" anchor="ctr"/>
           <a:lstStyle/>
           <a:p>
-            <a:pPr indent="0" marL="0">
+            <a:pPr marL="0" indent="0">
               <a:lnSpc>
                 <a:spcPts val="2000"/>
               </a:lnSpc>
@@ -5933,12 +5499,6 @@
               </a:rPr>
               <a:t>price</a:t>
             </a:r>
-            <a:pPr indent="0" marL="0">
-              <a:lnSpc>
-                <a:spcPts val="2000"/>
-              </a:lnSpc>
-              <a:buNone/>
-            </a:pPr>
             <a:r>
               <a:rPr lang="en-US" sz="1400" dirty="0">
                 <a:solidFill>
@@ -5975,7 +5535,7 @@
           <a:bodyPr wrap="square" rtlCol="0" anchor="ctr"/>
           <a:lstStyle/>
           <a:p>
-            <a:pPr indent="0" marL="0">
+            <a:pPr marL="0" indent="0">
               <a:lnSpc>
                 <a:spcPts val="1500"/>
               </a:lnSpc>
@@ -6005,7 +5565,7 @@
         <p:spPr>
           <a:xfrm>
             <a:off x="731520" y="4023360"/>
-            <a:ext cx="4572000" cy="2011680"/>
+            <a:ext cx="4572000" cy="2331720"/>
           </a:xfrm>
           <a:prstGeom prst="roundRect">
             <a:avLst>
@@ -6044,11 +5604,11 @@
           <a:bodyPr wrap="square" rtlCol="0" anchor="ctr"/>
           <a:lstStyle/>
           <a:p>
-            <a:pPr indent="0" marL="0">
-              <a:buNone/>
-            </a:pPr>
-            <a:r>
-              <a:rPr lang="en-US" sz="1100" b="1" spc="100" kern="0" dirty="0">
+            <a:pPr marL="0" indent="0">
+              <a:buNone/>
+            </a:pPr>
+            <a:r>
+              <a:rPr lang="en-US" sz="1100" b="1" kern="0" spc="100" dirty="0">
                 <a:solidFill>
                   <a:srgbClr val="0E7F5A"/>
                 </a:solidFill>
@@ -6103,7 +5663,7 @@
           <a:bodyPr wrap="square" rtlCol="0" anchor="ctr"/>
           <a:lstStyle/>
           <a:p>
-            <a:pPr indent="0" marL="0">
+            <a:pPr marL="0" indent="0">
               <a:buNone/>
             </a:pPr>
             <a:r>
@@ -6115,7 +5675,7 @@
                 <a:ea typeface="Cambria" pitchFamily="34" charset="-122"/>
                 <a:cs typeface="Cambria" pitchFamily="34" charset="-120"/>
               </a:rPr>
-              <a:t>Groq agentic review</a:t>
+              <a:t>Agentic AI review</a:t>
             </a:r>
             <a:endParaRPr lang="en-US" sz="1500" dirty="0"/>
           </a:p>
@@ -6142,7 +5702,7 @@
           <a:bodyPr wrap="square" rtlCol="0" anchor="ctr"/>
           <a:lstStyle/>
           <a:p>
-            <a:pPr indent="0" marL="0">
+            <a:pPr marL="0" indent="0">
               <a:lnSpc>
                 <a:spcPts val="1400"/>
               </a:lnSpc>
@@ -6204,7 +5764,7 @@
           <a:bodyPr wrap="square" rtlCol="0" anchor="ctr"/>
           <a:lstStyle/>
           <a:p>
-            <a:pPr indent="0" marL="0">
+            <a:pPr marL="0" indent="0">
               <a:buNone/>
             </a:pPr>
             <a:r>
@@ -6216,7 +5776,7 @@
                 <a:ea typeface="Cambria" pitchFamily="34" charset="-122"/>
                 <a:cs typeface="Cambria" pitchFamily="34" charset="-120"/>
               </a:rPr>
-              <a:t>Gemini recommendations</a:t>
+              <a:t>LLM recommendations</a:t>
             </a:r>
             <a:endParaRPr lang="en-US" sz="1500" dirty="0"/>
           </a:p>
@@ -6243,7 +5803,7 @@
           <a:bodyPr wrap="square" rtlCol="0" anchor="ctr"/>
           <a:lstStyle/>
           <a:p>
-            <a:pPr indent="0" marL="0">
+            <a:pPr marL="0" indent="0">
               <a:lnSpc>
                 <a:spcPts val="1400"/>
               </a:lnSpc>
@@ -6285,11 +5845,11 @@
           <a:bodyPr wrap="square" rtlCol="0" anchor="ctr"/>
           <a:lstStyle/>
           <a:p>
-            <a:pPr indent="0" marL="0">
-              <a:buNone/>
-            </a:pPr>
-            <a:r>
-              <a:rPr lang="en-US" sz="1100" b="1" spc="200" kern="0" dirty="0">
+            <a:pPr marL="0" indent="0">
+              <a:buNone/>
+            </a:pPr>
+            <a:r>
+              <a:rPr lang="en-US" sz="1100" b="1" kern="0" spc="200" dirty="0">
                 <a:solidFill>
                   <a:srgbClr val="0E1F1A"/>
                 </a:solidFill>
@@ -6351,7 +5911,7 @@
           <a:bodyPr wrap="square" rtlCol="0" anchor="ctr"/>
           <a:lstStyle/>
           <a:p>
-            <a:pPr indent="0" marL="0">
+            <a:pPr marL="0" indent="0">
               <a:buNone/>
             </a:pPr>
             <a:r>
@@ -6390,7 +5950,7 @@
           <a:bodyPr wrap="square" rtlCol="0" anchor="ctr"/>
           <a:lstStyle/>
           <a:p>
-            <a:pPr indent="0" marL="0">
+            <a:pPr marL="0" indent="0">
               <a:lnSpc>
                 <a:spcPts val="1400"/>
               </a:lnSpc>
@@ -6459,7 +6019,7 @@
           <a:bodyPr wrap="square" rtlCol="0" anchor="ctr"/>
           <a:lstStyle/>
           <a:p>
-            <a:pPr indent="0" marL="0">
+            <a:pPr marL="0" indent="0">
               <a:buNone/>
             </a:pPr>
             <a:r>
@@ -6498,7 +6058,7 @@
           <a:bodyPr wrap="square" rtlCol="0" anchor="ctr"/>
           <a:lstStyle/>
           <a:p>
-            <a:pPr indent="0" marL="0">
+            <a:pPr marL="0" indent="0">
               <a:lnSpc>
                 <a:spcPts val="1400"/>
               </a:lnSpc>
@@ -6567,7 +6127,7 @@
           <a:bodyPr wrap="square" rtlCol="0" anchor="ctr"/>
           <a:lstStyle/>
           <a:p>
-            <a:pPr indent="0" marL="0">
+            <a:pPr marL="0" indent="0">
               <a:buNone/>
             </a:pPr>
             <a:r>
@@ -6606,7 +6166,7 @@
           <a:bodyPr wrap="square" rtlCol="0" anchor="ctr"/>
           <a:lstStyle/>
           <a:p>
-            <a:pPr indent="0" marL="0">
+            <a:pPr marL="0" indent="0">
               <a:lnSpc>
                 <a:spcPts val="1400"/>
               </a:lnSpc>
@@ -6675,7 +6235,7 @@
           <a:bodyPr wrap="square" rtlCol="0" anchor="ctr"/>
           <a:lstStyle/>
           <a:p>
-            <a:pPr indent="0" marL="0">
+            <a:pPr marL="0" indent="0">
               <a:buNone/>
             </a:pPr>
             <a:r>
@@ -6714,7 +6274,7 @@
           <a:bodyPr wrap="square" rtlCol="0" anchor="ctr"/>
           <a:lstStyle/>
           <a:p>
-            <a:pPr indent="0" marL="0">
+            <a:pPr marL="0" indent="0">
               <a:lnSpc>
                 <a:spcPts val="1400"/>
               </a:lnSpc>
@@ -6783,7 +6343,7 @@
           <a:bodyPr wrap="square" rtlCol="0" anchor="ctr"/>
           <a:lstStyle/>
           <a:p>
-            <a:pPr indent="0" marL="0">
+            <a:pPr marL="0" indent="0">
               <a:buNone/>
             </a:pPr>
             <a:r>
@@ -6822,7 +6382,7 @@
           <a:bodyPr wrap="square" rtlCol="0" anchor="ctr"/>
           <a:lstStyle/>
           <a:p>
-            <a:pPr indent="0" marL="0">
+            <a:pPr marL="0" indent="0">
               <a:lnSpc>
                 <a:spcPts val="1400"/>
               </a:lnSpc>
@@ -6891,7 +6451,7 @@
           <a:bodyPr wrap="square" rtlCol="0" anchor="ctr"/>
           <a:lstStyle/>
           <a:p>
-            <a:pPr indent="0" marL="0">
+            <a:pPr marL="0" indent="0">
               <a:buNone/>
             </a:pPr>
             <a:r>
@@ -6930,7 +6490,7 @@
           <a:bodyPr wrap="square" rtlCol="0" anchor="ctr"/>
           <a:lstStyle/>
           <a:p>
-            <a:pPr indent="0" marL="0">
+            <a:pPr marL="0" indent="0">
               <a:lnSpc>
                 <a:spcPts val="1400"/>
               </a:lnSpc>
@@ -6999,7 +6559,7 @@
           <a:bodyPr wrap="square" rtlCol="0" anchor="ctr"/>
           <a:lstStyle/>
           <a:p>
-            <a:pPr indent="0" marL="0">
+            <a:pPr marL="0" indent="0">
               <a:buNone/>
             </a:pPr>
             <a:r>
@@ -7038,7 +6598,7 @@
           <a:bodyPr wrap="square" rtlCol="0" anchor="ctr"/>
           <a:lstStyle/>
           <a:p>
-            <a:pPr indent="0" marL="0">
+            <a:pPr marL="0" indent="0">
               <a:lnSpc>
                 <a:spcPts val="1400"/>
               </a:lnSpc>
@@ -7107,7 +6667,7 @@
           <a:bodyPr wrap="square" rtlCol="0" anchor="ctr"/>
           <a:lstStyle/>
           <a:p>
-            <a:pPr indent="0" marL="0">
+            <a:pPr marL="0" indent="0">
               <a:buNone/>
             </a:pPr>
             <a:r>
@@ -7146,7 +6706,7 @@
           <a:bodyPr wrap="square" rtlCol="0" anchor="ctr"/>
           <a:lstStyle/>
           <a:p>
-            <a:pPr indent="0" marL="0">
+            <a:pPr marL="0" indent="0">
               <a:lnSpc>
                 <a:spcPts val="1400"/>
               </a:lnSpc>
@@ -7215,7 +6775,7 @@
           <a:bodyPr wrap="square" rtlCol="0" anchor="ctr"/>
           <a:lstStyle/>
           <a:p>
-            <a:pPr indent="0" marL="0">
+            <a:pPr marL="0" indent="0">
               <a:buNone/>
             </a:pPr>
             <a:r>
@@ -7254,7 +6814,7 @@
           <a:bodyPr wrap="square" rtlCol="0" anchor="ctr"/>
           <a:lstStyle/>
           <a:p>
-            <a:pPr indent="0" marL="0">
+            <a:pPr marL="0" indent="0">
               <a:lnSpc>
                 <a:spcPts val="1400"/>
               </a:lnSpc>
@@ -7291,6 +6851,7 @@
         <a:solidFill>
           <a:srgbClr val="F5F8F6"/>
         </a:solidFill>
+        <a:effectLst/>
       </p:bgPr>
     </p:bg>
     <p:spTree>
@@ -7328,7 +6889,7 @@
           <a:bodyPr wrap="square" rtlCol="0" anchor="ctr"/>
           <a:lstStyle/>
           <a:p>
-            <a:pPr indent="0" marL="0">
+            <a:pPr marL="0" indent="0">
               <a:buNone/>
             </a:pPr>
             <a:r>
@@ -7367,7 +6928,7 @@
           <a:bodyPr wrap="square" rtlCol="0" anchor="ctr"/>
           <a:lstStyle/>
           <a:p>
-            <a:pPr indent="0" marL="0">
+            <a:pPr marL="0" indent="0">
               <a:buNone/>
             </a:pPr>
             <a:r>
@@ -7411,7 +6972,7 @@
             <a:prstDash val="solid"/>
           </a:ln>
           <a:effectLst>
-            <a:outerShdw sx="100000" sy="100000" kx="0" ky="0" algn="bl" rotWithShape="0" blurRad="76200" dist="25400" dir="5400000">
+            <a:outerShdw blurRad="76200" dist="25400" dir="5400000" algn="bl" rotWithShape="0">
               <a:srgbClr val="9CB3AA">
                 <a:alpha val="30000"/>
               </a:srgbClr>
@@ -7460,7 +7021,7 @@
           <a:bodyPr wrap="square" lIns="0" tIns="0" rIns="0" bIns="0" rtlCol="0" anchor="ctr"/>
           <a:lstStyle/>
           <a:p>
-            <a:pPr algn="ctr" indent="0" marL="0">
+            <a:pPr marL="0" indent="0" algn="ctr">
               <a:buNone/>
             </a:pPr>
             <a:r>
@@ -7499,7 +7060,7 @@
           <a:bodyPr wrap="square" rtlCol="0" anchor="ctr"/>
           <a:lstStyle/>
           <a:p>
-            <a:pPr indent="0" marL="0">
+            <a:pPr marL="0" indent="0">
               <a:buNone/>
             </a:pPr>
             <a:r>
@@ -7538,7 +7099,7 @@
           <a:bodyPr wrap="square" rtlCol="0" anchor="ctr"/>
           <a:lstStyle/>
           <a:p>
-            <a:pPr indent="0" marL="0">
+            <a:pPr marL="0" indent="0">
               <a:lnSpc>
                 <a:spcPts val="1500"/>
               </a:lnSpc>
@@ -7585,7 +7146,7 @@
             <a:prstDash val="solid"/>
           </a:ln>
           <a:effectLst>
-            <a:outerShdw sx="100000" sy="100000" kx="0" ky="0" algn="bl" rotWithShape="0" blurRad="76200" dist="25400" dir="5400000">
+            <a:outerShdw blurRad="76200" dist="25400" dir="5400000" algn="bl" rotWithShape="0">
               <a:srgbClr val="9CB3AA">
                 <a:alpha val="30000"/>
               </a:srgbClr>
@@ -7634,7 +7195,7 @@
           <a:bodyPr wrap="square" lIns="0" tIns="0" rIns="0" bIns="0" rtlCol="0" anchor="ctr"/>
           <a:lstStyle/>
           <a:p>
-            <a:pPr algn="ctr" indent="0" marL="0">
+            <a:pPr marL="0" indent="0" algn="ctr">
               <a:buNone/>
             </a:pPr>
             <a:r>
@@ -7673,7 +7234,7 @@
           <a:bodyPr wrap="square" rtlCol="0" anchor="ctr"/>
           <a:lstStyle/>
           <a:p>
-            <a:pPr indent="0" marL="0">
+            <a:pPr marL="0" indent="0">
               <a:buNone/>
             </a:pPr>
             <a:r>
@@ -7712,7 +7273,7 @@
           <a:bodyPr wrap="square" rtlCol="0" anchor="ctr"/>
           <a:lstStyle/>
           <a:p>
-            <a:pPr indent="0" marL="0">
+            <a:pPr marL="0" indent="0">
               <a:lnSpc>
                 <a:spcPts val="1500"/>
               </a:lnSpc>
@@ -7759,7 +7320,7 @@
             <a:prstDash val="solid"/>
           </a:ln>
           <a:effectLst>
-            <a:outerShdw sx="100000" sy="100000" kx="0" ky="0" algn="bl" rotWithShape="0" blurRad="76200" dist="25400" dir="5400000">
+            <a:outerShdw blurRad="76200" dist="25400" dir="5400000" algn="bl" rotWithShape="0">
               <a:srgbClr val="9CB3AA">
                 <a:alpha val="30000"/>
               </a:srgbClr>
@@ -7808,7 +7369,7 @@
           <a:bodyPr wrap="square" lIns="0" tIns="0" rIns="0" bIns="0" rtlCol="0" anchor="ctr"/>
           <a:lstStyle/>
           <a:p>
-            <a:pPr algn="ctr" indent="0" marL="0">
+            <a:pPr marL="0" indent="0" algn="ctr">
               <a:buNone/>
             </a:pPr>
             <a:r>
@@ -7847,7 +7408,7 @@
           <a:bodyPr wrap="square" rtlCol="0" anchor="ctr"/>
           <a:lstStyle/>
           <a:p>
-            <a:pPr indent="0" marL="0">
+            <a:pPr marL="0" indent="0">
               <a:buNone/>
             </a:pPr>
             <a:r>
@@ -7886,7 +7447,7 @@
           <a:bodyPr wrap="square" rtlCol="0" anchor="ctr"/>
           <a:lstStyle/>
           <a:p>
-            <a:pPr indent="0" marL="0">
+            <a:pPr marL="0" indent="0">
               <a:lnSpc>
                 <a:spcPts val="1500"/>
               </a:lnSpc>
@@ -7933,7 +7494,7 @@
             <a:prstDash val="solid"/>
           </a:ln>
           <a:effectLst>
-            <a:outerShdw sx="100000" sy="100000" kx="0" ky="0" algn="bl" rotWithShape="0" blurRad="76200" dist="25400" dir="5400000">
+            <a:outerShdw blurRad="76200" dist="25400" dir="5400000" algn="bl" rotWithShape="0">
               <a:srgbClr val="9CB3AA">
                 <a:alpha val="30000"/>
               </a:srgbClr>
@@ -7982,7 +7543,7 @@
           <a:bodyPr wrap="square" lIns="0" tIns="0" rIns="0" bIns="0" rtlCol="0" anchor="ctr"/>
           <a:lstStyle/>
           <a:p>
-            <a:pPr algn="ctr" indent="0" marL="0">
+            <a:pPr marL="0" indent="0" algn="ctr">
               <a:buNone/>
             </a:pPr>
             <a:r>
@@ -8021,7 +7582,7 @@
           <a:bodyPr wrap="square" rtlCol="0" anchor="ctr"/>
           <a:lstStyle/>
           <a:p>
-            <a:pPr indent="0" marL="0">
+            <a:pPr marL="0" indent="0">
               <a:buNone/>
             </a:pPr>
             <a:r>
@@ -8060,7 +7621,7 @@
           <a:bodyPr wrap="square" rtlCol="0" anchor="ctr"/>
           <a:lstStyle/>
           <a:p>
-            <a:pPr indent="0" marL="0">
+            <a:pPr marL="0" indent="0">
               <a:lnSpc>
                 <a:spcPts val="1500"/>
               </a:lnSpc>
@@ -8107,7 +7668,7 @@
             <a:prstDash val="solid"/>
           </a:ln>
           <a:effectLst>
-            <a:outerShdw sx="100000" sy="100000" kx="0" ky="0" algn="bl" rotWithShape="0" blurRad="76200" dist="25400" dir="5400000">
+            <a:outerShdw blurRad="76200" dist="25400" dir="5400000" algn="bl" rotWithShape="0">
               <a:srgbClr val="9CB3AA">
                 <a:alpha val="30000"/>
               </a:srgbClr>
@@ -8156,7 +7717,7 @@
           <a:bodyPr wrap="square" lIns="0" tIns="0" rIns="0" bIns="0" rtlCol="0" anchor="ctr"/>
           <a:lstStyle/>
           <a:p>
-            <a:pPr algn="ctr" indent="0" marL="0">
+            <a:pPr marL="0" indent="0" algn="ctr">
               <a:buNone/>
             </a:pPr>
             <a:r>
@@ -8195,7 +7756,7 @@
           <a:bodyPr wrap="square" rtlCol="0" anchor="ctr"/>
           <a:lstStyle/>
           <a:p>
-            <a:pPr indent="0" marL="0">
+            <a:pPr marL="0" indent="0">
               <a:buNone/>
             </a:pPr>
             <a:r>
@@ -8234,7 +7795,7 @@
           <a:bodyPr wrap="square" rtlCol="0" anchor="ctr"/>
           <a:lstStyle/>
           <a:p>
-            <a:pPr indent="0" marL="0">
+            <a:pPr marL="0" indent="0">
               <a:lnSpc>
                 <a:spcPts val="1500"/>
               </a:lnSpc>
@@ -8281,7 +7842,7 @@
             <a:prstDash val="solid"/>
           </a:ln>
           <a:effectLst>
-            <a:outerShdw sx="100000" sy="100000" kx="0" ky="0" algn="bl" rotWithShape="0" blurRad="76200" dist="25400" dir="5400000">
+            <a:outerShdw blurRad="76200" dist="25400" dir="5400000" algn="bl" rotWithShape="0">
               <a:srgbClr val="9CB3AA">
                 <a:alpha val="30000"/>
               </a:srgbClr>
@@ -8330,7 +7891,7 @@
           <a:bodyPr wrap="square" lIns="0" tIns="0" rIns="0" bIns="0" rtlCol="0" anchor="ctr"/>
           <a:lstStyle/>
           <a:p>
-            <a:pPr algn="ctr" indent="0" marL="0">
+            <a:pPr marL="0" indent="0" algn="ctr">
               <a:buNone/>
             </a:pPr>
             <a:r>
@@ -8369,7 +7930,7 @@
           <a:bodyPr wrap="square" rtlCol="0" anchor="ctr"/>
           <a:lstStyle/>
           <a:p>
-            <a:pPr indent="0" marL="0">
+            <a:pPr marL="0" indent="0">
               <a:buNone/>
             </a:pPr>
             <a:r>
@@ -8408,7 +7969,7 @@
           <a:bodyPr wrap="square" rtlCol="0" anchor="ctr"/>
           <a:lstStyle/>
           <a:p>
-            <a:pPr indent="0" marL="0">
+            <a:pPr marL="0" indent="0">
               <a:lnSpc>
                 <a:spcPts val="1500"/>
               </a:lnSpc>
@@ -8445,6 +8006,7 @@
         <a:solidFill>
           <a:srgbClr val="0B211B"/>
         </a:solidFill>
+        <a:effectLst/>
       </p:bgPr>
     </p:bg>
     <p:spTree>
@@ -8482,7 +8044,7 @@
           <a:bodyPr wrap="square" rtlCol="0" anchor="ctr"/>
           <a:lstStyle/>
           <a:p>
-            <a:pPr indent="0" marL="0">
+            <a:pPr marL="0" indent="0">
               <a:buNone/>
             </a:pPr>
             <a:r>
@@ -8521,7 +8083,7 @@
           <a:bodyPr wrap="square" rtlCol="0" anchor="ctr"/>
           <a:lstStyle/>
           <a:p>
-            <a:pPr indent="0" marL="0">
+            <a:pPr marL="0" indent="0">
               <a:buNone/>
             </a:pPr>
             <a:r>
@@ -8603,7 +8165,7 @@
           <a:bodyPr wrap="square" lIns="0" tIns="0" rIns="0" bIns="0" rtlCol="0" anchor="ctr"/>
           <a:lstStyle/>
           <a:p>
-            <a:pPr algn="ctr" indent="0" marL="0">
+            <a:pPr marL="0" indent="0" algn="ctr">
               <a:buNone/>
             </a:pPr>
             <a:r>
@@ -8669,7 +8231,7 @@
           <a:bodyPr wrap="square" rtlCol="0" anchor="ctr"/>
           <a:lstStyle/>
           <a:p>
-            <a:pPr algn="ctr" indent="0" marL="0">
+            <a:pPr marL="0" indent="0" algn="ctr">
               <a:buNone/>
             </a:pPr>
             <a:r>
@@ -8708,7 +8270,7 @@
           <a:bodyPr wrap="square" rtlCol="0" anchor="ctr"/>
           <a:lstStyle/>
           <a:p>
-            <a:pPr algn="ctr" indent="0" marL="0">
+            <a:pPr marL="0" indent="0" algn="ctr">
               <a:lnSpc>
                 <a:spcPts val="1300"/>
               </a:lnSpc>
@@ -8793,7 +8355,7 @@
           <a:bodyPr wrap="square" lIns="0" tIns="0" rIns="0" bIns="0" rtlCol="0" anchor="ctr"/>
           <a:lstStyle/>
           <a:p>
-            <a:pPr algn="ctr" indent="0" marL="0">
+            <a:pPr marL="0" indent="0" algn="ctr">
               <a:buNone/>
             </a:pPr>
             <a:r>
@@ -8859,7 +8421,7 @@
           <a:bodyPr wrap="square" rtlCol="0" anchor="ctr"/>
           <a:lstStyle/>
           <a:p>
-            <a:pPr algn="ctr" indent="0" marL="0">
+            <a:pPr marL="0" indent="0" algn="ctr">
               <a:buNone/>
             </a:pPr>
             <a:r>
@@ -8898,7 +8460,7 @@
           <a:bodyPr wrap="square" rtlCol="0" anchor="ctr"/>
           <a:lstStyle/>
           <a:p>
-            <a:pPr algn="ctr" indent="0" marL="0">
+            <a:pPr marL="0" indent="0" algn="ctr">
               <a:lnSpc>
                 <a:spcPts val="1300"/>
               </a:lnSpc>
@@ -8927,8 +8489,8 @@
         </p:nvSpPr>
         <p:spPr>
           <a:xfrm>
-            <a:off x="3163824" y="3794760"/>
-            <a:ext cx="0" cy="521208"/>
+            <a:off x="3163824" y="3946848"/>
+            <a:ext cx="0" cy="369119"/>
           </a:xfrm>
           <a:prstGeom prst="line">
             <a:avLst/>
@@ -8983,7 +8545,7 @@
           <a:bodyPr wrap="square" lIns="0" tIns="0" rIns="0" bIns="0" rtlCol="0" anchor="ctr"/>
           <a:lstStyle/>
           <a:p>
-            <a:pPr algn="ctr" indent="0" marL="0">
+            <a:pPr marL="0" indent="0" algn="ctr">
               <a:buNone/>
             </a:pPr>
             <a:r>
@@ -9049,7 +8611,7 @@
           <a:bodyPr wrap="square" rtlCol="0" anchor="ctr"/>
           <a:lstStyle/>
           <a:p>
-            <a:pPr algn="ctr" indent="0" marL="0">
+            <a:pPr marL="0" indent="0" algn="ctr">
               <a:buNone/>
             </a:pPr>
             <a:r>
@@ -9088,7 +8650,7 @@
           <a:bodyPr wrap="square" rtlCol="0" anchor="ctr"/>
           <a:lstStyle/>
           <a:p>
-            <a:pPr algn="ctr" indent="0" marL="0">
+            <a:pPr marL="0" indent="0" algn="ctr">
               <a:lnSpc>
                 <a:spcPts val="1300"/>
               </a:lnSpc>
@@ -9173,7 +8735,7 @@
           <a:bodyPr wrap="square" lIns="0" tIns="0" rIns="0" bIns="0" rtlCol="0" anchor="ctr"/>
           <a:lstStyle/>
           <a:p>
-            <a:pPr algn="ctr" indent="0" marL="0">
+            <a:pPr marL="0" indent="0" algn="ctr">
               <a:buNone/>
             </a:pPr>
             <a:r>
@@ -9239,7 +8801,7 @@
           <a:bodyPr wrap="square" rtlCol="0" anchor="ctr"/>
           <a:lstStyle/>
           <a:p>
-            <a:pPr algn="ctr" indent="0" marL="0">
+            <a:pPr marL="0" indent="0" algn="ctr">
               <a:buNone/>
             </a:pPr>
             <a:r>
@@ -9278,7 +8840,7 @@
           <a:bodyPr wrap="square" rtlCol="0" anchor="ctr"/>
           <a:lstStyle/>
           <a:p>
-            <a:pPr algn="ctr" indent="0" marL="0">
+            <a:pPr marL="0" indent="0" algn="ctr">
               <a:lnSpc>
                 <a:spcPts val="1300"/>
               </a:lnSpc>
@@ -9307,8 +8869,8 @@
         </p:nvSpPr>
         <p:spPr>
           <a:xfrm>
-            <a:off x="7022592" y="3794760"/>
-            <a:ext cx="0" cy="521208"/>
+            <a:off x="7022592" y="3946848"/>
+            <a:ext cx="0" cy="369120"/>
           </a:xfrm>
           <a:prstGeom prst="line">
             <a:avLst/>
@@ -9363,7 +8925,7 @@
           <a:bodyPr wrap="square" lIns="0" tIns="0" rIns="0" bIns="0" rtlCol="0" anchor="ctr"/>
           <a:lstStyle/>
           <a:p>
-            <a:pPr algn="ctr" indent="0" marL="0">
+            <a:pPr marL="0" indent="0" algn="ctr">
               <a:buNone/>
             </a:pPr>
             <a:r>
@@ -9429,7 +8991,7 @@
           <a:bodyPr wrap="square" rtlCol="0" anchor="ctr"/>
           <a:lstStyle/>
           <a:p>
-            <a:pPr algn="ctr" indent="0" marL="0">
+            <a:pPr marL="0" indent="0" algn="ctr">
               <a:buNone/>
             </a:pPr>
             <a:r>
@@ -9468,7 +9030,7 @@
           <a:bodyPr wrap="square" rtlCol="0" anchor="ctr"/>
           <a:lstStyle/>
           <a:p>
-            <a:pPr algn="ctr" indent="0" marL="0">
+            <a:pPr marL="0" indent="0" algn="ctr">
               <a:lnSpc>
                 <a:spcPts val="1300"/>
               </a:lnSpc>
@@ -9553,7 +9115,7 @@
           <a:bodyPr wrap="square" lIns="0" tIns="0" rIns="0" bIns="0" rtlCol="0" anchor="ctr"/>
           <a:lstStyle/>
           <a:p>
-            <a:pPr algn="ctr" indent="0" marL="0">
+            <a:pPr marL="0" indent="0" algn="ctr">
               <a:buNone/>
             </a:pPr>
             <a:r>
@@ -9619,7 +9181,7 @@
           <a:bodyPr wrap="square" rtlCol="0" anchor="ctr"/>
           <a:lstStyle/>
           <a:p>
-            <a:pPr algn="ctr" indent="0" marL="0">
+            <a:pPr marL="0" indent="0" algn="ctr">
               <a:buNone/>
             </a:pPr>
             <a:r>
@@ -9658,7 +9220,7 @@
           <a:bodyPr wrap="square" rtlCol="0" anchor="ctr"/>
           <a:lstStyle/>
           <a:p>
-            <a:pPr algn="ctr" indent="0" marL="0">
+            <a:pPr marL="0" indent="0" algn="ctr">
               <a:lnSpc>
                 <a:spcPts val="1300"/>
               </a:lnSpc>
@@ -9687,8 +9249,8 @@
         </p:nvSpPr>
         <p:spPr>
           <a:xfrm>
-            <a:off x="10881360" y="3794760"/>
-            <a:ext cx="0" cy="521208"/>
+            <a:off x="10881360" y="3946848"/>
+            <a:ext cx="0" cy="369120"/>
           </a:xfrm>
           <a:prstGeom prst="line">
             <a:avLst/>
@@ -9718,6 +9280,7 @@
         <a:solidFill>
           <a:srgbClr val="0B211B"/>
         </a:solidFill>
+        <a:effectLst/>
       </p:bgPr>
     </p:bg>
     <p:spTree>
@@ -9815,7 +9378,7 @@
           <a:bodyPr wrap="square" rtlCol="0" anchor="ctr"/>
           <a:lstStyle/>
           <a:p>
-            <a:pPr indent="0" marL="0">
+            <a:pPr marL="0" indent="0">
               <a:buNone/>
             </a:pPr>
             <a:r>
@@ -9854,7 +9417,7 @@
           <a:bodyPr wrap="square" rtlCol="0" anchor="ctr"/>
           <a:lstStyle/>
           <a:p>
-            <a:pPr indent="0" marL="0">
+            <a:pPr marL="0" indent="0">
               <a:buNone/>
             </a:pPr>
             <a:r>
@@ -9881,7 +9444,7 @@
         <p:spPr>
           <a:xfrm>
             <a:off x="777240" y="2286000"/>
-            <a:ext cx="2514600" cy="2057400"/>
+            <a:ext cx="2514600" cy="2164702"/>
           </a:xfrm>
           <a:prstGeom prst="roundRect">
             <a:avLst>
@@ -9937,11 +9500,11 @@
           <a:bodyPr wrap="square" lIns="0" tIns="0" rIns="0" bIns="0" rtlCol="0" anchor="ctr"/>
           <a:lstStyle/>
           <a:p>
-            <a:pPr algn="ctr" indent="0" marL="0">
-              <a:buNone/>
-            </a:pPr>
-            <a:r>
-              <a:rPr lang="en-US" sz="1050" b="1" spc="100" kern="0" dirty="0">
+            <a:pPr marL="0" indent="0" algn="ctr">
+              <a:buNone/>
+            </a:pPr>
+            <a:r>
+              <a:rPr lang="en-US" sz="1050" b="1" kern="0" spc="100" dirty="0">
                 <a:solidFill>
                   <a:srgbClr val="FFFFFF"/>
                 </a:solidFill>
@@ -9976,7 +9539,7 @@
           <a:bodyPr wrap="square" rtlCol="0" anchor="ctr"/>
           <a:lstStyle/>
           <a:p>
-            <a:pPr indent="0" marL="0">
+            <a:pPr marL="0" indent="0">
               <a:lnSpc>
                 <a:spcPts val="2000"/>
               </a:lnSpc>
@@ -10018,7 +9581,7 @@
           <a:bodyPr wrap="square" rtlCol="0" anchor="ctr"/>
           <a:lstStyle/>
           <a:p>
-            <a:pPr indent="0" marL="0">
+            <a:pPr marL="0" indent="0">
               <a:lnSpc>
                 <a:spcPts val="1500"/>
               </a:lnSpc>
@@ -10048,7 +9611,7 @@
         <p:spPr>
           <a:xfrm>
             <a:off x="3520440" y="2286000"/>
-            <a:ext cx="2514600" cy="2057400"/>
+            <a:ext cx="2514600" cy="2164702"/>
           </a:xfrm>
           <a:prstGeom prst="roundRect">
             <a:avLst>
@@ -10104,11 +9667,11 @@
           <a:bodyPr wrap="square" lIns="0" tIns="0" rIns="0" bIns="0" rtlCol="0" anchor="ctr"/>
           <a:lstStyle/>
           <a:p>
-            <a:pPr algn="ctr" indent="0" marL="0">
-              <a:buNone/>
-            </a:pPr>
-            <a:r>
-              <a:rPr lang="en-US" sz="1050" b="1" spc="100" kern="0" dirty="0">
+            <a:pPr marL="0" indent="0" algn="ctr">
+              <a:buNone/>
+            </a:pPr>
+            <a:r>
+              <a:rPr lang="en-US" sz="1050" b="1" kern="0" spc="100" dirty="0">
                 <a:solidFill>
                   <a:srgbClr val="0B211B"/>
                 </a:solidFill>
@@ -10143,7 +9706,7 @@
           <a:bodyPr wrap="square" rtlCol="0" anchor="ctr"/>
           <a:lstStyle/>
           <a:p>
-            <a:pPr indent="0" marL="0">
+            <a:pPr marL="0" indent="0">
               <a:lnSpc>
                 <a:spcPts val="2000"/>
               </a:lnSpc>
@@ -10185,7 +9748,7 @@
           <a:bodyPr wrap="square" rtlCol="0" anchor="ctr"/>
           <a:lstStyle/>
           <a:p>
-            <a:pPr indent="0" marL="0">
+            <a:pPr marL="0" indent="0">
               <a:lnSpc>
                 <a:spcPts val="1500"/>
               </a:lnSpc>
@@ -10215,7 +9778,7 @@
         <p:spPr>
           <a:xfrm>
             <a:off x="6263640" y="2286000"/>
-            <a:ext cx="2514600" cy="2057400"/>
+            <a:ext cx="2514600" cy="2164702"/>
           </a:xfrm>
           <a:prstGeom prst="roundRect">
             <a:avLst>
@@ -10271,11 +9834,11 @@
           <a:bodyPr wrap="square" lIns="0" tIns="0" rIns="0" bIns="0" rtlCol="0" anchor="ctr"/>
           <a:lstStyle/>
           <a:p>
-            <a:pPr algn="ctr" indent="0" marL="0">
-              <a:buNone/>
-            </a:pPr>
-            <a:r>
-              <a:rPr lang="en-US" sz="1050" b="1" spc="100" kern="0" dirty="0">
+            <a:pPr marL="0" indent="0" algn="ctr">
+              <a:buNone/>
+            </a:pPr>
+            <a:r>
+              <a:rPr lang="en-US" sz="1050" b="1" kern="0" spc="100" dirty="0">
                 <a:solidFill>
                   <a:srgbClr val="FFFFFF"/>
                 </a:solidFill>
@@ -10310,7 +9873,7 @@
           <a:bodyPr wrap="square" rtlCol="0" anchor="ctr"/>
           <a:lstStyle/>
           <a:p>
-            <a:pPr indent="0" marL="0">
+            <a:pPr marL="0" indent="0">
               <a:lnSpc>
                 <a:spcPts val="2000"/>
               </a:lnSpc>
@@ -10352,7 +9915,7 @@
           <a:bodyPr wrap="square" rtlCol="0" anchor="ctr"/>
           <a:lstStyle/>
           <a:p>
-            <a:pPr indent="0" marL="0">
+            <a:pPr marL="0" indent="0">
               <a:lnSpc>
                 <a:spcPts val="1500"/>
               </a:lnSpc>
@@ -10382,7 +9945,7 @@
         <p:spPr>
           <a:xfrm>
             <a:off x="9006840" y="2286000"/>
-            <a:ext cx="2514600" cy="2057400"/>
+            <a:ext cx="2514600" cy="2164702"/>
           </a:xfrm>
           <a:prstGeom prst="roundRect">
             <a:avLst>
@@ -10438,11 +10001,11 @@
           <a:bodyPr wrap="square" lIns="0" tIns="0" rIns="0" bIns="0" rtlCol="0" anchor="ctr"/>
           <a:lstStyle/>
           <a:p>
-            <a:pPr algn="ctr" indent="0" marL="0">
-              <a:buNone/>
-            </a:pPr>
-            <a:r>
-              <a:rPr lang="en-US" sz="1050" b="1" spc="100" kern="0" dirty="0">
+            <a:pPr marL="0" indent="0" algn="ctr">
+              <a:buNone/>
+            </a:pPr>
+            <a:r>
+              <a:rPr lang="en-US" sz="1050" b="1" kern="0" spc="100" dirty="0">
                 <a:solidFill>
                   <a:srgbClr val="FFFFFF"/>
                 </a:solidFill>
@@ -10477,7 +10040,7 @@
           <a:bodyPr wrap="square" rtlCol="0" anchor="ctr"/>
           <a:lstStyle/>
           <a:p>
-            <a:pPr indent="0" marL="0">
+            <a:pPr marL="0" indent="0">
               <a:lnSpc>
                 <a:spcPts val="2000"/>
               </a:lnSpc>
@@ -10519,7 +10082,7 @@
           <a:bodyPr wrap="square" rtlCol="0" anchor="ctr"/>
           <a:lstStyle/>
           <a:p>
-            <a:pPr indent="0" marL="0">
+            <a:pPr marL="0" indent="0">
               <a:lnSpc>
                 <a:spcPts val="1500"/>
               </a:lnSpc>
@@ -10583,7 +10146,7 @@
           <a:bodyPr wrap="square" rtlCol="0" anchor="ctr"/>
           <a:lstStyle/>
           <a:p>
-            <a:pPr indent="0" marL="0">
+            <a:pPr marL="0" indent="0">
               <a:buNone/>
             </a:pPr>
             <a:r>
@@ -10622,7 +10185,7 @@
           <a:bodyPr wrap="square" rtlCol="0" anchor="ctr"/>
           <a:lstStyle/>
           <a:p>
-            <a:pPr indent="0" marL="0">
+            <a:pPr marL="0" indent="0">
               <a:buNone/>
             </a:pPr>
             <a:r>
@@ -10941,4 +10504,299 @@
     </a:ext>
   </a:extLst>
 </a:theme>
+</file>
+
+<file path=ppt/theme/theme2.xml><?xml version="1.0" encoding="utf-8"?>
+<a:theme xmlns:a="http://schemas.openxmlformats.org/drawingml/2006/main" name="Office Theme">
+  <a:themeElements>
+    <a:clrScheme name="Office">
+      <a:dk1>
+        <a:sysClr val="windowText" lastClr="000000"/>
+      </a:dk1>
+      <a:lt1>
+        <a:sysClr val="window" lastClr="FFFFFF"/>
+      </a:lt1>
+      <a:dk2>
+        <a:srgbClr val="44546A"/>
+      </a:dk2>
+      <a:lt2>
+        <a:srgbClr val="E7E6E6"/>
+      </a:lt2>
+      <a:accent1>
+        <a:srgbClr val="4472C4"/>
+      </a:accent1>
+      <a:accent2>
+        <a:srgbClr val="ED7D31"/>
+      </a:accent2>
+      <a:accent3>
+        <a:srgbClr val="A5A5A5"/>
+      </a:accent3>
+      <a:accent4>
+        <a:srgbClr val="FFC000"/>
+      </a:accent4>
+      <a:accent5>
+        <a:srgbClr val="5B9BD5"/>
+      </a:accent5>
+      <a:accent6>
+        <a:srgbClr val="70AD47"/>
+      </a:accent6>
+      <a:hlink>
+        <a:srgbClr val="0563C1"/>
+      </a:hlink>
+      <a:folHlink>
+        <a:srgbClr val="954F72"/>
+      </a:folHlink>
+    </a:clrScheme>
+    <a:fontScheme name="Office">
+      <a:majorFont>
+        <a:latin typeface="Calibri Light" panose="020F0302020204030204"/>
+        <a:ea typeface=""/>
+        <a:cs typeface=""/>
+        <a:font script="Jpan" typeface="游ゴシック Light"/>
+        <a:font script="Hang" typeface="맑은 고딕"/>
+        <a:font script="Hans" typeface="等线 Light"/>
+        <a:font script="Hant" typeface="新細明體"/>
+        <a:font script="Arab" typeface="Times New Roman"/>
+        <a:font script="Hebr" typeface="Times New Roman"/>
+        <a:font script="Thai" typeface="Angsana New"/>
+        <a:font script="Ethi" typeface="Nyala"/>
+        <a:font script="Beng" typeface="Vrinda"/>
+        <a:font script="Gujr" typeface="Shruti"/>
+        <a:font script="Khmr" typeface="MoolBoran"/>
+        <a:font script="Knda" typeface="Tunga"/>
+        <a:font script="Guru" typeface="Raavi"/>
+        <a:font script="Cans" typeface="Euphemia"/>
+        <a:font script="Cher" typeface="Plantagenet Cherokee"/>
+        <a:font script="Yiii" typeface="Microsoft Yi Baiti"/>
+        <a:font script="Tibt" typeface="Microsoft Himalaya"/>
+        <a:font script="Thaa" typeface="MV Boli"/>
+        <a:font script="Deva" typeface="Mangal"/>
+        <a:font script="Telu" typeface="Gautami"/>
+        <a:font script="Taml" typeface="Latha"/>
+        <a:font script="Syrc" typeface="Estrangelo Edessa"/>
+        <a:font script="Orya" typeface="Kalinga"/>
+        <a:font script="Mlym" typeface="Kartika"/>
+        <a:font script="Laoo" typeface="DokChampa"/>
+        <a:font script="Sinh" typeface="Iskoola Pota"/>
+        <a:font script="Mong" typeface="Mongolian Baiti"/>
+        <a:font script="Viet" typeface="Times New Roman"/>
+        <a:font script="Uigh" typeface="Microsoft Uighur"/>
+        <a:font script="Geor" typeface="Sylfaen"/>
+        <a:font script="Armn" typeface="Arial"/>
+        <a:font script="Bugi" typeface="Leelawadee UI"/>
+        <a:font script="Bopo" typeface="Microsoft JhengHei"/>
+        <a:font script="Java" typeface="Javanese Text"/>
+        <a:font script="Lisu" typeface="Segoe UI"/>
+        <a:font script="Mymr" typeface="Myanmar Text"/>
+        <a:font script="Nkoo" typeface="Ebrima"/>
+        <a:font script="Olck" typeface="Nirmala UI"/>
+        <a:font script="Osma" typeface="Ebrima"/>
+        <a:font script="Phag" typeface="Phagspa"/>
+        <a:font script="Syrn" typeface="Estrangelo Edessa"/>
+        <a:font script="Syrj" typeface="Estrangelo Edessa"/>
+        <a:font script="Syre" typeface="Estrangelo Edessa"/>
+        <a:font script="Sora" typeface="Nirmala UI"/>
+        <a:font script="Tale" typeface="Microsoft Tai Le"/>
+        <a:font script="Talu" typeface="Microsoft New Tai Lue"/>
+        <a:font script="Tfng" typeface="Ebrima"/>
+      </a:majorFont>
+      <a:minorFont>
+        <a:latin typeface="Calibri" panose="020F0502020204030204"/>
+        <a:ea typeface=""/>
+        <a:cs typeface=""/>
+        <a:font script="Jpan" typeface="游ゴシック"/>
+        <a:font script="Hang" typeface="맑은 고딕"/>
+        <a:font script="Hans" typeface="等线"/>
+        <a:font script="Hant" typeface="新細明體"/>
+        <a:font script="Arab" typeface="Arial"/>
+        <a:font script="Hebr" typeface="Arial"/>
+        <a:font script="Thai" typeface="Cordia New"/>
+        <a:font script="Ethi" typeface="Nyala"/>
+        <a:font script="Beng" typeface="Vrinda"/>
+        <a:font script="Gujr" typeface="Shruti"/>
+        <a:font script="Khmr" typeface="DaunPenh"/>
+        <a:font script="Knda" typeface="Tunga"/>
+        <a:font script="Guru" typeface="Raavi"/>
+        <a:font script="Cans" typeface="Euphemia"/>
+        <a:font script="Cher" typeface="Plantagenet Cherokee"/>
+        <a:font script="Yiii" typeface="Microsoft Yi Baiti"/>
+        <a:font script="Tibt" typeface="Microsoft Himalaya"/>
+        <a:font script="Thaa" typeface="MV Boli"/>
+        <a:font script="Deva" typeface="Mangal"/>
+        <a:font script="Telu" typeface="Gautami"/>
+        <a:font script="Taml" typeface="Latha"/>
+        <a:font script="Syrc" typeface="Estrangelo Edessa"/>
+        <a:font script="Orya" typeface="Kalinga"/>
+        <a:font script="Mlym" typeface="Kartika"/>
+        <a:font script="Laoo" typeface="DokChampa"/>
+        <a:font script="Sinh" typeface="Iskoola Pota"/>
+        <a:font script="Mong" typeface="Mongolian Baiti"/>
+        <a:font script="Viet" typeface="Arial"/>
+        <a:font script="Uigh" typeface="Microsoft Uighur"/>
+        <a:font script="Geor" typeface="Sylfaen"/>
+        <a:font script="Armn" typeface="Arial"/>
+        <a:font script="Bugi" typeface="Leelawadee UI"/>
+        <a:font script="Bopo" typeface="Microsoft JhengHei"/>
+        <a:font script="Java" typeface="Javanese Text"/>
+        <a:font script="Lisu" typeface="Segoe UI"/>
+        <a:font script="Mymr" typeface="Myanmar Text"/>
+        <a:font script="Nkoo" typeface="Ebrima"/>
+        <a:font script="Olck" typeface="Nirmala UI"/>
+        <a:font script="Osma" typeface="Ebrima"/>
+        <a:font script="Phag" typeface="Phagspa"/>
+        <a:font script="Syrn" typeface="Estrangelo Edessa"/>
+        <a:font script="Syrj" typeface="Estrangelo Edessa"/>
+        <a:font script="Syre" typeface="Estrangelo Edessa"/>
+        <a:font script="Sora" typeface="Nirmala UI"/>
+        <a:font script="Tale" typeface="Microsoft Tai Le"/>
+        <a:font script="Talu" typeface="Microsoft New Tai Lue"/>
+        <a:font script="Tfng" typeface="Ebrima"/>
+      </a:minorFont>
+    </a:fontScheme>
+    <a:fmtScheme name="Office">
+      <a:fillStyleLst>
+        <a:solidFill>
+          <a:schemeClr val="phClr"/>
+        </a:solidFill>
+        <a:gradFill rotWithShape="1">
+          <a:gsLst>
+            <a:gs pos="0">
+              <a:schemeClr val="phClr">
+                <a:lumMod val="110000"/>
+                <a:satMod val="105000"/>
+                <a:tint val="67000"/>
+              </a:schemeClr>
+            </a:gs>
+            <a:gs pos="50000">
+              <a:schemeClr val="phClr">
+                <a:lumMod val="105000"/>
+                <a:satMod val="103000"/>
+                <a:tint val="73000"/>
+              </a:schemeClr>
+            </a:gs>
+            <a:gs pos="100000">
+              <a:schemeClr val="phClr">
+                <a:lumMod val="105000"/>
+                <a:satMod val="109000"/>
+                <a:tint val="81000"/>
+              </a:schemeClr>
+            </a:gs>
+          </a:gsLst>
+          <a:lin ang="5400000" scaled="0"/>
+        </a:gradFill>
+        <a:gradFill rotWithShape="1">
+          <a:gsLst>
+            <a:gs pos="0">
+              <a:schemeClr val="phClr">
+                <a:satMod val="103000"/>
+                <a:lumMod val="102000"/>
+                <a:tint val="94000"/>
+              </a:schemeClr>
+            </a:gs>
+            <a:gs pos="50000">
+              <a:schemeClr val="phClr">
+                <a:satMod val="110000"/>
+                <a:lumMod val="100000"/>
+                <a:shade val="100000"/>
+              </a:schemeClr>
+            </a:gs>
+            <a:gs pos="100000">
+              <a:schemeClr val="phClr">
+                <a:lumMod val="99000"/>
+                <a:satMod val="120000"/>
+                <a:shade val="78000"/>
+              </a:schemeClr>
+            </a:gs>
+          </a:gsLst>
+          <a:lin ang="5400000" scaled="0"/>
+        </a:gradFill>
+      </a:fillStyleLst>
+      <a:lnStyleLst>
+        <a:ln w="6350" cap="flat" cmpd="sng" algn="ctr">
+          <a:solidFill>
+            <a:schemeClr val="phClr"/>
+          </a:solidFill>
+          <a:prstDash val="solid"/>
+          <a:miter lim="800000"/>
+        </a:ln>
+        <a:ln w="12700" cap="flat" cmpd="sng" algn="ctr">
+          <a:solidFill>
+            <a:schemeClr val="phClr"/>
+          </a:solidFill>
+          <a:prstDash val="solid"/>
+          <a:miter lim="800000"/>
+        </a:ln>
+        <a:ln w="19050" cap="flat" cmpd="sng" algn="ctr">
+          <a:solidFill>
+            <a:schemeClr val="phClr"/>
+          </a:solidFill>
+          <a:prstDash val="solid"/>
+          <a:miter lim="800000"/>
+        </a:ln>
+      </a:lnStyleLst>
+      <a:effectStyleLst>
+        <a:effectStyle>
+          <a:effectLst/>
+        </a:effectStyle>
+        <a:effectStyle>
+          <a:effectLst/>
+        </a:effectStyle>
+        <a:effectStyle>
+          <a:effectLst>
+            <a:outerShdw blurRad="57150" dist="19050" dir="5400000" algn="ctr" rotWithShape="0">
+              <a:srgbClr val="000000">
+                <a:alpha val="63000"/>
+              </a:srgbClr>
+            </a:outerShdw>
+          </a:effectLst>
+        </a:effectStyle>
+      </a:effectStyleLst>
+      <a:bgFillStyleLst>
+        <a:solidFill>
+          <a:schemeClr val="phClr"/>
+        </a:solidFill>
+        <a:solidFill>
+          <a:schemeClr val="phClr">
+            <a:tint val="95000"/>
+            <a:satMod val="170000"/>
+          </a:schemeClr>
+        </a:solidFill>
+        <a:gradFill rotWithShape="1">
+          <a:gsLst>
+            <a:gs pos="0">
+              <a:schemeClr val="phClr">
+                <a:tint val="93000"/>
+                <a:satMod val="150000"/>
+                <a:shade val="98000"/>
+                <a:lumMod val="102000"/>
+              </a:schemeClr>
+            </a:gs>
+            <a:gs pos="50000">
+              <a:schemeClr val="phClr">
+                <a:tint val="98000"/>
+                <a:satMod val="130000"/>
+                <a:shade val="90000"/>
+                <a:lumMod val="103000"/>
+              </a:schemeClr>
+            </a:gs>
+            <a:gs pos="100000">
+              <a:schemeClr val="phClr">
+                <a:shade val="63000"/>
+                <a:satMod val="120000"/>
+              </a:schemeClr>
+            </a:gs>
+          </a:gsLst>
+          <a:lin ang="5400000" scaled="0"/>
+        </a:gradFill>
+      </a:bgFillStyleLst>
+    </a:fmtScheme>
+  </a:themeElements>
+  <a:objectDefaults/>
+  <a:extraClrSchemeLst/>
+  <a:extLst>
+    <a:ext uri="{05A4C25C-085E-4340-85A3-A5531E510DB2}">
+      <thm15:themeFamily xmlns:thm15="http://schemas.microsoft.com/office/thememl/2012/main" name="Office Theme" id="{62F939B6-93AF-4DB8-9C6B-D6C7DFDC589F}" vid="{4A3C46E8-61CC-4603-A589-7422A47A8E4A}"/>
+    </a:ext>
+  </a:extLst>
+</a:theme>
 </file>